--- a/docs/pitch/keynote-deck.pptx
+++ b/docs/pitch/keynote-deck.pptx
@@ -18,9 +18,10 @@
     <p:sldId id="266" r:id="rId12"/>
     <p:sldId id="267" r:id="rId13"/>
     <p:sldId id="268" r:id="rId14"/>
+    <p:sldId id="269" r:id="rId15"/>
   </p:sldIdLst>
   <p:notesMasterIdLst>
-    <p:notesMasterId r:id="rId15"/>
+    <p:notesMasterId r:id="rId16"/>
   </p:notesMasterIdLst>
   <p:sldSz cx="12192000" cy="6858000"/>
   <p:notesSz cx="6858000" cy="12192000"/>
@@ -604,6 +605,99 @@
           <a:p>
             <a:r>
               <a:rPr lang="en-US" dirty="0"/>
+              <a:t>SPEAKER NOTES (slide 9 — Product proof + demo beat)
+This is the PROOF slide. Point at the buddy's chat in the hero screenshot.
+The 3 starter prompts in the screenshot map DIRECTLY to 3 specialists — that's the user-facing surface of the multi-agent diagram from slide 7. Make this point explicitly:
+"You can see the buddy — Dianna in this case — offering three starter prompts. Each one routes to a different specialist underneath. Tell me a story → image_story. What's in the news → kids_daily. Choose your own adventure → interactive_story. One chat surface, the multi-agent team behind it."
+DEMO BEAT (optional but high-impact):
+If you have 15 seconds of buffer, open the actual app and run ONE flow live — preferably drawing-to-story. Don't try to demo all four specialists; pick one and let it land. If you don't have live demo capability, replace this slide's demo box with a 10-second screen recording (drop it into Keynote as a video).</a:t>
+            </a:r>
+            <a:endParaRPr lang="en-US" dirty="0"/>
+          </a:p>
+        </p:txBody>
+      </p:sp>
+      <p:sp>
+        <p:nvSpPr>
+          <p:cNvPr id="4" name="Slide Number Placeholder 3"/>
+          <p:cNvSpPr>
+            <a:spLocks noGrp="1"/>
+          </p:cNvSpPr>
+          <p:nvPr>
+            <p:ph type="sldNum" sz="quarter" idx="10"/>
+          </p:nvPr>
+        </p:nvSpPr>
+        <p:spPr/>
+        <p:txBody>
+          <a:bodyPr/>
+          <a:lstStyle/>
+          <a:p>
+            <a:fld id="{F7021451-1387-4CA6-816F-3879F97B5CBC}" type="slidenum">
+              <a:rPr lang="en-US"/>
+              <a:t>10</a:t>
+            </a:fld>
+            <a:endParaRPr lang="en-US"/>
+          </a:p>
+        </p:txBody>
+      </p:sp>
+    </p:spTree>
+    <p:extLst>
+      <p:ext uri="{BB962C8B-B14F-4D97-AF65-F5344CB8AC3E}">
+        <p14:creationId xmlns:p14="http://schemas.microsoft.com/office/powerpoint/2010/main" val="1024086991"/>
+      </p:ext>
+    </p:extLst>
+  </p:cSld>
+  <p:clrMapOvr>
+    <a:masterClrMapping/>
+  </p:clrMapOvr>
+</p:notes>
+</file>
+
+<file path=ppt/notesSlides/notesSlide11.xml><?xml version="1.0" encoding="utf-8"?>
+<p:notes xmlns:a="http://schemas.openxmlformats.org/drawingml/2006/main" xmlns:r="http://schemas.openxmlformats.org/officeDocument/2006/relationships" xmlns:p="http://schemas.openxmlformats.org/presentationml/2006/main">
+  <p:cSld>
+    <p:spTree>
+      <p:nvGrpSpPr>
+        <p:cNvPr id="1" name=""/>
+        <p:cNvGrpSpPr/>
+        <p:nvPr/>
+      </p:nvGrpSpPr>
+      <p:grpSpPr>
+        <a:xfrm>
+          <a:off x="0" y="0"/>
+          <a:ext cx="0" cy="0"/>
+          <a:chOff x="0" y="0"/>
+          <a:chExt cx="0" cy="0"/>
+        </a:xfrm>
+      </p:grpSpPr>
+      <p:sp>
+        <p:nvSpPr>
+          <p:cNvPr id="2" name="Slide Image Placeholder 1"/>
+          <p:cNvSpPr>
+            <a:spLocks noGrp="1" noRot="1" noChangeAspect="1"/>
+          </p:cNvSpPr>
+          <p:nvPr>
+            <p:ph type="sldImg"/>
+          </p:nvPr>
+        </p:nvSpPr>
+        <p:spPr/>
+      </p:sp>
+      <p:sp>
+        <p:nvSpPr>
+          <p:cNvPr id="3" name="Notes Placeholder 2"/>
+          <p:cNvSpPr>
+            <a:spLocks noGrp="1"/>
+          </p:cNvSpPr>
+          <p:nvPr>
+            <p:ph type="body" idx="1"/>
+          </p:nvPr>
+        </p:nvSpPr>
+        <p:spPr/>
+        <p:txBody>
+          <a:bodyPr/>
+          <a:lstStyle/>
+          <a:p>
+            <a:r>
+              <a:rPr lang="en-US" dirty="0"/>
               <a:t>SPEAKER NOTES (slide 9 — Traction)
 The "272 stories shipped" is execution proof. So is the silent-safety-bypass-fixed-in-1-day story (that's the kind of receipt judges remember).
 If you have pilot users, replace the italic line. Even closed-beta numbers are credibility.</a:t>
@@ -629,7 +723,7 @@
           <a:p>
             <a:fld id="{F7021451-1387-4CA6-816F-3879F97B5CBC}" type="slidenum">
               <a:rPr lang="en-US"/>
-              <a:t>10</a:t>
+              <a:t>11</a:t>
             </a:fld>
             <a:endParaRPr lang="en-US"/>
           </a:p>
@@ -648,7 +742,7 @@
 </p:notes>
 </file>
 
-<file path=ppt/notesSlides/notesSlide11.xml><?xml version="1.0" encoding="utf-8"?>
+<file path=ppt/notesSlides/notesSlide12.xml><?xml version="1.0" encoding="utf-8"?>
 <p:notes xmlns:a="http://schemas.openxmlformats.org/drawingml/2006/main" xmlns:r="http://schemas.openxmlformats.org/officeDocument/2006/relationships" xmlns:p="http://schemas.openxmlformats.org/presentationml/2006/main">
   <p:cSld>
     <p:spTree>
@@ -724,7 +818,7 @@
           <a:p>
             <a:fld id="{F7021451-1387-4CA6-816F-3879F97B5CBC}" type="slidenum">
               <a:rPr lang="en-US"/>
-              <a:t>11</a:t>
+              <a:t>12</a:t>
             </a:fld>
             <a:endParaRPr lang="en-US"/>
           </a:p>
@@ -743,7 +837,7 @@
 </p:notes>
 </file>
 
-<file path=ppt/notesSlides/notesSlide12.xml><?xml version="1.0" encoding="utf-8"?>
+<file path=ppt/notesSlides/notesSlide13.xml><?xml version="1.0" encoding="utf-8"?>
 <p:notes xmlns:a="http://schemas.openxmlformats.org/drawingml/2006/main" xmlns:r="http://schemas.openxmlformats.org/officeDocument/2006/relationships" xmlns:p="http://schemas.openxmlformats.org/presentationml/2006/main">
   <p:cSld>
     <p:spTree>
@@ -815,7 +909,7 @@
           <a:p>
             <a:fld id="{F7021451-1387-4CA6-816F-3879F97B5CBC}" type="slidenum">
               <a:rPr lang="en-US"/>
-              <a:t>12</a:t>
+              <a:t>13</a:t>
             </a:fld>
             <a:endParaRPr lang="en-US"/>
           </a:p>
@@ -834,7 +928,7 @@
 </p:notes>
 </file>
 
-<file path=ppt/notesSlides/notesSlide13.xml><?xml version="1.0" encoding="utf-8"?>
+<file path=ppt/notesSlides/notesSlide14.xml><?xml version="1.0" encoding="utf-8"?>
 <p:notes xmlns:a="http://schemas.openxmlformats.org/drawingml/2006/main" xmlns:r="http://schemas.openxmlformats.org/officeDocument/2006/relationships" xmlns:p="http://schemas.openxmlformats.org/presentationml/2006/main">
   <p:cSld>
     <p:spTree>
@@ -906,7 +1000,7 @@
           <a:p>
             <a:fld id="{F7021451-1387-4CA6-816F-3879F97B5CBC}" type="slidenum">
               <a:rPr lang="en-US"/>
-              <a:t>13</a:t>
+              <a:t>14</a:t>
             </a:fld>
             <a:endParaRPr lang="en-US"/>
           </a:p>
@@ -1522,6 +1616,102 @@
           <a:p>
             <a:r>
               <a:rPr lang="en-US" dirty="0"/>
+              <a:t>SPEAKER NOTES (slide 8 — Design decisions, NEW)
+This is the "we made decisions, not defaults" slide.
+Walk it row-by-row, ~7 seconds per row:
+1. Prompts: "We could have inlined prompts as Python strings. We chose markdown files in git — versioned, code-reviewable, age-stratified per file."
+2. Tools: "We could have called the API directly inside agent code. We chose custom MCP servers with typed envelopes — composable, testable, and the .handler convention lets us debug them."
+3. Skills: "We could have hardcoded behaviors. We chose enabled_skills as a field on AgentDefinition — per-age gating, A2A extensible, server-side gate."
+4. Multi-agent: "We could have used a bigger system prompt with branching. We chose a proxy + 4 subagents — each specialty isolated, safety subagent on EVERY reply, responsive routing."
+Close: "We didn't adopt defaults. Each row is a trade-off we made deliberately."
+DEFAULT-CUT FOR 5-MIN — keep for 6-min slot or technical-heavy judging panels.</a:t>
+            </a:r>
+            <a:endParaRPr lang="en-US" dirty="0"/>
+          </a:p>
+        </p:txBody>
+      </p:sp>
+      <p:sp>
+        <p:nvSpPr>
+          <p:cNvPr id="4" name="Slide Number Placeholder 3"/>
+          <p:cNvSpPr>
+            <a:spLocks noGrp="1"/>
+          </p:cNvSpPr>
+          <p:nvPr>
+            <p:ph type="sldNum" sz="quarter" idx="10"/>
+          </p:nvPr>
+        </p:nvSpPr>
+        <p:spPr/>
+        <p:txBody>
+          <a:bodyPr/>
+          <a:lstStyle/>
+          <a:p>
+            <a:fld id="{F7021451-1387-4CA6-816F-3879F97B5CBC}" type="slidenum">
+              <a:rPr lang="en-US"/>
+              <a:t>8</a:t>
+            </a:fld>
+            <a:endParaRPr lang="en-US"/>
+          </a:p>
+        </p:txBody>
+      </p:sp>
+    </p:spTree>
+    <p:extLst>
+      <p:ext uri="{BB962C8B-B14F-4D97-AF65-F5344CB8AC3E}">
+        <p14:creationId xmlns:p14="http://schemas.microsoft.com/office/powerpoint/2010/main" val="1024086991"/>
+      </p:ext>
+    </p:extLst>
+  </p:cSld>
+  <p:clrMapOvr>
+    <a:masterClrMapping/>
+  </p:clrMapOvr>
+</p:notes>
+</file>
+
+<file path=ppt/notesSlides/notesSlide9.xml><?xml version="1.0" encoding="utf-8"?>
+<p:notes xmlns:a="http://schemas.openxmlformats.org/drawingml/2006/main" xmlns:r="http://schemas.openxmlformats.org/officeDocument/2006/relationships" xmlns:p="http://schemas.openxmlformats.org/presentationml/2006/main">
+  <p:cSld>
+    <p:spTree>
+      <p:nvGrpSpPr>
+        <p:cNvPr id="1" name=""/>
+        <p:cNvGrpSpPr/>
+        <p:nvPr/>
+      </p:nvGrpSpPr>
+      <p:grpSpPr>
+        <a:xfrm>
+          <a:off x="0" y="0"/>
+          <a:ext cx="0" cy="0"/>
+          <a:chOff x="0" y="0"/>
+          <a:chExt cx="0" cy="0"/>
+        </a:xfrm>
+      </p:grpSpPr>
+      <p:sp>
+        <p:nvSpPr>
+          <p:cNvPr id="2" name="Slide Image Placeholder 1"/>
+          <p:cNvSpPr>
+            <a:spLocks noGrp="1" noRot="1" noChangeAspect="1"/>
+          </p:cNvSpPr>
+          <p:nvPr>
+            <p:ph type="sldImg"/>
+          </p:nvPr>
+        </p:nvSpPr>
+        <p:spPr/>
+      </p:sp>
+      <p:sp>
+        <p:nvSpPr>
+          <p:cNvPr id="3" name="Notes Placeholder 2"/>
+          <p:cNvSpPr>
+            <a:spLocks noGrp="1"/>
+          </p:cNvSpPr>
+          <p:nvPr>
+            <p:ph type="body" idx="1"/>
+          </p:nvPr>
+        </p:nvSpPr>
+        <p:spPr/>
+        <p:txBody>
+          <a:bodyPr/>
+          <a:lstStyle/>
+          <a:p>
+            <a:r>
+              <a:rPr lang="en-US" dirty="0"/>
               <a:t>SPEAKER NOTES (slide 8 — Innovation moats, NEW)
 This is the "we are not a wrapper" slide. Read each cell as a defensible claim, NOT a feature list.
 Walk it column-by-column, ~7 seconds per cell:
@@ -1529,99 +1719,6 @@
 - Safety architecture: "Per-reply programmatic safety with age-aware thresholds — and COPPA enforced AT THE SCHEMA LEVEL. The unsafe JOIN can't even be expressed."
 - Kid experience: "Character continuity across surfaces — same Lightning the puppy from her drawing shows up in her interactive story, her podcast, her community feed. One buddy, many specialists, one identity."
 Land hard on: "Most ship ONE of these. We ship ALL SIX." Pause. Then move.</a:t>
-            </a:r>
-            <a:endParaRPr lang="en-US" dirty="0"/>
-          </a:p>
-        </p:txBody>
-      </p:sp>
-      <p:sp>
-        <p:nvSpPr>
-          <p:cNvPr id="4" name="Slide Number Placeholder 3"/>
-          <p:cNvSpPr>
-            <a:spLocks noGrp="1"/>
-          </p:cNvSpPr>
-          <p:nvPr>
-            <p:ph type="sldNum" sz="quarter" idx="10"/>
-          </p:nvPr>
-        </p:nvSpPr>
-        <p:spPr/>
-        <p:txBody>
-          <a:bodyPr/>
-          <a:lstStyle/>
-          <a:p>
-            <a:fld id="{F7021451-1387-4CA6-816F-3879F97B5CBC}" type="slidenum">
-              <a:rPr lang="en-US"/>
-              <a:t>8</a:t>
-            </a:fld>
-            <a:endParaRPr lang="en-US"/>
-          </a:p>
-        </p:txBody>
-      </p:sp>
-    </p:spTree>
-    <p:extLst>
-      <p:ext uri="{BB962C8B-B14F-4D97-AF65-F5344CB8AC3E}">
-        <p14:creationId xmlns:p14="http://schemas.microsoft.com/office/powerpoint/2010/main" val="1024086991"/>
-      </p:ext>
-    </p:extLst>
-  </p:cSld>
-  <p:clrMapOvr>
-    <a:masterClrMapping/>
-  </p:clrMapOvr>
-</p:notes>
-</file>
-
-<file path=ppt/notesSlides/notesSlide9.xml><?xml version="1.0" encoding="utf-8"?>
-<p:notes xmlns:a="http://schemas.openxmlformats.org/drawingml/2006/main" xmlns:r="http://schemas.openxmlformats.org/officeDocument/2006/relationships" xmlns:p="http://schemas.openxmlformats.org/presentationml/2006/main">
-  <p:cSld>
-    <p:spTree>
-      <p:nvGrpSpPr>
-        <p:cNvPr id="1" name=""/>
-        <p:cNvGrpSpPr/>
-        <p:nvPr/>
-      </p:nvGrpSpPr>
-      <p:grpSpPr>
-        <a:xfrm>
-          <a:off x="0" y="0"/>
-          <a:ext cx="0" cy="0"/>
-          <a:chOff x="0" y="0"/>
-          <a:chExt cx="0" cy="0"/>
-        </a:xfrm>
-      </p:grpSpPr>
-      <p:sp>
-        <p:nvSpPr>
-          <p:cNvPr id="2" name="Slide Image Placeholder 1"/>
-          <p:cNvSpPr>
-            <a:spLocks noGrp="1" noRot="1" noChangeAspect="1"/>
-          </p:cNvSpPr>
-          <p:nvPr>
-            <p:ph type="sldImg"/>
-          </p:nvPr>
-        </p:nvSpPr>
-        <p:spPr/>
-      </p:sp>
-      <p:sp>
-        <p:nvSpPr>
-          <p:cNvPr id="3" name="Notes Placeholder 2"/>
-          <p:cNvSpPr>
-            <a:spLocks noGrp="1"/>
-          </p:cNvSpPr>
-          <p:nvPr>
-            <p:ph type="body" idx="1"/>
-          </p:nvPr>
-        </p:nvSpPr>
-        <p:spPr/>
-        <p:txBody>
-          <a:bodyPr/>
-          <a:lstStyle/>
-          <a:p>
-            <a:r>
-              <a:rPr lang="en-US" dirty="0"/>
-              <a:t>SPEAKER NOTES (slide 9 — Product proof + demo beat)
-This is the PROOF slide. Point at the buddy's chat in the hero screenshot.
-The 3 starter prompts in the screenshot map DIRECTLY to 3 specialists — that's the user-facing surface of the multi-agent diagram from slide 7. Make this point explicitly:
-"You can see the buddy — Dianna in this case — offering three starter prompts. Each one routes to a different specialist underneath. Tell me a story → image_story. What's in the news → kids_daily. Choose your own adventure → interactive_story. One chat surface, the multi-agent team behind it."
-DEMO BEAT (optional but high-impact):
-If you have 15 seconds of buffer, open the actual app and run ONE flow live — preferably drawing-to-story. Don't try to demo all four specialists; pick one and let it land. If you don't have live demo capability, replace this slide's demo box with a 10-second screen recording (drop it into Keynote as a video).</a:t>
             </a:r>
             <a:endParaRPr lang="en-US" dirty="0"/>
           </a:p>
@@ -2129,6 +2226,45 @@
 <file path=ppt/slides/slide13.xml><?xml version="1.0" encoding="utf-8"?>
 <p:sld xmlns:a="http://schemas.openxmlformats.org/drawingml/2006/main" xmlns:r="http://schemas.openxmlformats.org/officeDocument/2006/relationships" xmlns:p="http://schemas.openxmlformats.org/presentationml/2006/main">
   <p:cSld name="Slide 13">
+    <p:bg>
+      <p:bgPr>
+        <a:blipFill dpi="0" rotWithShape="1">
+          <a:blip r:embed="rId1">
+            <a:lum/>
+          </a:blip>
+          <a:srcRect/>
+          <a:stretch>
+            <a:fillRect/>
+          </a:stretch>
+        </a:blipFill>
+        <a:effectLst/>
+      </p:bgPr>
+    </p:bg>
+    <p:spTree>
+      <p:nvGrpSpPr>
+        <p:cNvPr id="1" name=""/>
+        <p:cNvGrpSpPr/>
+        <p:nvPr/>
+      </p:nvGrpSpPr>
+      <p:grpSpPr>
+        <a:xfrm>
+          <a:off x="0" y="0"/>
+          <a:ext cx="0" cy="0"/>
+          <a:chOff x="0" y="0"/>
+          <a:chExt cx="0" cy="0"/>
+        </a:xfrm>
+      </p:grpSpPr>
+    </p:spTree>
+  </p:cSld>
+  <p:clrMapOvr>
+    <a:masterClrMapping/>
+  </p:clrMapOvr>
+</p:sld>
+</file>
+
+<file path=ppt/slides/slide14.xml><?xml version="1.0" encoding="utf-8"?>
+<p:sld xmlns:a="http://schemas.openxmlformats.org/drawingml/2006/main" xmlns:r="http://schemas.openxmlformats.org/officeDocument/2006/relationships" xmlns:p="http://schemas.openxmlformats.org/presentationml/2006/main">
+  <p:cSld name="Slide 14">
     <p:bg>
       <p:bgPr>
         <a:blipFill dpi="0" rotWithShape="1">

--- a/docs/pitch/keynote-deck.pptx
+++ b/docs/pitch/keynote-deck.pptx
@@ -515,9 +515,13 @@
           <a:p>
             <a:r>
               <a:rPr lang="en-US" dirty="0"/>
-              <a:t>SPEAKER NOTES (slide 1 — Title)
-Open warm and slow. Read the title, pause, read the subtitle slowly.
-Say: "I want to start with a moment." Then click forward.</a:t>
+              <a:t>🎤 SCRIPT · Slide 1 · Title
+⏱ ~8 seconds · 5-min cut: KEEP
+"Good [morning/afternoon]. Kids Creative Workshop —
+an agentic app for kids, built on Claude Agent SDK.
+Let me start with a moment."
+🎬 Delivery: Warm and slow. Don't rush the subtitle. Pause, then click.
+➡ Transition: pivot directly to the emotional anchor on slide 2.</a:t>
             </a:r>
             <a:endParaRPr lang="en-US" dirty="0"/>
           </a:p>
@@ -605,12 +609,20 @@
           <a:p>
             <a:r>
               <a:rPr lang="en-US" dirty="0"/>
-              <a:t>SPEAKER NOTES (slide 9 — Product proof + demo beat)
-This is the PROOF slide. Point at the buddy's chat in the hero screenshot.
-The 3 starter prompts in the screenshot map DIRECTLY to 3 specialists — that's the user-facing surface of the multi-agent diagram from slide 7. Make this point explicitly:
-"You can see the buddy — Dianna in this case — offering three starter prompts. Each one routes to a different specialist underneath. Tell me a story → image_story. What's in the news → kids_daily. Choose your own adventure → interactive_story. One chat surface, the multi-agent team behind it."
-DEMO BEAT (optional but high-impact):
-If you have 15 seconds of buffer, open the actual app and run ONE flow live — preferably drawing-to-story. Don't try to demo all four specialists; pick one and let it land. If you don't have live demo capability, replace this slide's demo box with a 10-second screen recording (drop it into Keynote as a video).</a:t>
+              <a:t>🎤 SCRIPT · Slide 10 · Product proof + demo beat
+⏱ ~35 seconds · 5-min cut: KEEP
+"You can see the buddy here — Dianna in this case —
+offering three starter prompts.
+Each one routes to a different specialist underneath.
+'Tell me a bedtime story' goes to image_story.
+'What's in the news for kids' goes to kids_daily.
+'Choose your own adventure' goes to interactive_story.
+One chat surface. The multi-agent team behind it.
+[OPTIONAL — 15-second live demo here. Open the app.
+Draw → buddy generates a story with their character.
+Pick ONE flow, not all four. Let it land.]"
+🎬 Delivery: Point at the hero screenshot. Read the 3 prompts. Make the mapping to specialists EXPLICIT — it's the proof of the slide-7 architecture.
+➡ Transition: "Here's where we are in shipping this."</a:t>
             </a:r>
             <a:endParaRPr lang="en-US" dirty="0"/>
           </a:p>
@@ -698,9 +710,21 @@
           <a:p>
             <a:r>
               <a:rPr lang="en-US" dirty="0"/>
-              <a:t>SPEAKER NOTES (slide 9 — Traction)
-The "272 stories shipped" is execution proof. So is the silent-safety-bypass-fixed-in-1-day story (that's the kind of receipt judges remember).
-If you have pilot users, replace the italic line. Even closed-beta numbers are credibility.</a:t>
+              <a:t>🎤 SCRIPT · Slide 11 · Where we are
+⏱ ~25 seconds · 5-min cut: KEEP
+"Two hundred seventy-two stories shipped across
+three milestones.
+Phase 1 — MVP, single agent — done.
+Phase 2 — multi-agent team plus community — done.
+Phase 3 — video and parent dashboard — in design.
+Engineering rigor matters as much as features.
+Seven hundred contract tests. Per-reply programmatic
+safety. A silent safety-bypass we caught and fixed
+in twenty-four hours. A merge train of seven PRs
+landed last week.
+We don't pitch features — we ship them."
+🎬 Delivery: Speak the numbers slowly. "Two hundred seventy-two" beats "272/272" by a long way out loud. If you have real pilot numbers, replace the placeholder.
+➡ Transition: "And we own our bugs too."</a:t>
             </a:r>
             <a:endParaRPr lang="en-US" dirty="0"/>
           </a:p>
@@ -788,14 +812,25 @@
           <a:p>
             <a:r>
               <a:rPr lang="en-US" dirty="0"/>
-              <a:t>SPEAKER NOTES (slide 10 — Failures we owned, NEW)
-Counter-intuitive slide. Most pitches show only wins. This one builds trust by showing you look at your own AI critically.
-Land each row in ~9 seconds:
-1. "We tried the SDK subprocess for image-to-story — Railway killed it. So we ported to direct API and got half the memory back."
-2. "We tried calling check_content_safety directly — the wrapper isn't callable, the TypeError was swallowed, every story shipped with a default 0.9 score. We caught it ourselves and fixed it in a day."
-3. "We tried single agent + safety prompt — not good enough. So we built per-reply programmatic safety with retry."
-Punchline: "Most pitches hide bugs. We name ours. That's how you know we actually run safety like infrastructure."
-If your slot is tight, this is the FIRST slide to cut. But judges who see it remember it.</a:t>
+              <a:t>🎤 SCRIPT · Slide 12 · Failures we owned
+⏱ ~30 seconds · 5-min cut: DEFAULT-CUT (keep for 6-min slot)
+"And we own our bugs.
+We tried the SDK subprocess for image-to-story.
+Railway killed it — out-of-memory under load.
+So we ported all three generation agents to direct
+API. Got half the memory back.
+We tried calling check_content_safety directly.
+The wrapper isn't callable. The TypeError got
+swallowed. Every story shipped with a default
+0.9 score. We caught it ourselves and fixed it
+in twenty-four hours.
+We tried single agent plus a safety prompt.
+The model occasionally produced unsafe replies.
+So we built per-reply programmatic safety with
+suggest-and-retry.
+Most pitches hide bugs. We name ours."
+🎬 Delivery: Counter-intuitive slide. Speak each row in ~9 seconds. The 24-hour bypass story is the receipt — speak it slowly.
+➡ Transition: "Here's why this matters."</a:t>
             </a:r>
             <a:endParaRPr lang="en-US" dirty="0"/>
           </a:p>
@@ -883,10 +918,25 @@
           <a:p>
             <a:r>
               <a:rPr lang="en-US" dirty="0"/>
-              <a:t>SPEAKER NOTES (slide 11 — Closing bookend)
-Closing mirrors the opening ("agentic for kids" → "grows up WITH kids").
-Read the achievements briskly. PAUSE. Then deliver the closing line slowly, holding eye contact.
-Then: "Happy to take questions."</a:t>
+              <a:t>🎤 SCRIPT · Slide 13 · Why this matters (CLOSING BOOKEND)
+⏱ ~25 seconds · 5-min cut: KEEP
+"Why this matters.
+Agentic from day one — not a wrapper, not a prompt.
+Real SDK. Real tools. Real orchestration.
+272 stories shipped across three milestones —
+execution proof.
+Programmatic safety on every reply — non-negotiable,
+code-enforced, not vibes.
+A community that protects child PII at the schema
+level — COPPA by construction.
+A buddy that grows with the child — character
+continuity across image, story, podcast, and share.
+[PAUSE]
+AI that grows up WITH kids — safely.
+[PAUSE — hold eye contact, don't fill the silence]
+Happy to take questions."
+🎬 Delivery: Read the achievements briskly. PAUSE before the closing line. Deliver it SLOWLY, holding eye contact. Don't smile until you've said "happy to take questions."
+➡ End of pitch.</a:t>
             </a:r>
             <a:endParaRPr lang="en-US" dirty="0"/>
           </a:p>
@@ -974,10 +1024,29 @@
           <a:p>
             <a:r>
               <a:rPr lang="en-US" dirty="0"/>
-              <a:t>SPEAKER NOTES (slide 12 — APPENDIX, hidden by default)
-HIDE THIS SLIDE in Keynote during the main presentation (right-click slide thumbnail → Skip Slide).
-UNHIDE only if a judge asks a deep technical question during Q&amp;A — then jump to it.
-Each row is a one-line answer to a likely follow-up question. Don't read the whole table — jump to the relevant row.</a:t>
+              <a:t>🎤 SCRIPT · Slide 14 · Appendix (Q&amp;A backup, HIDDEN BY DEFAULT)
+⏱ Variable · Only reveal during Q&amp;A
+This slide should be HIDDEN during the main presentation:
+Keynote → right-click slide thumbnail → Skip Slide
+REVEAL only if a judge asks a deep technical question.
+Then jump straight to the relevant row.
+Example responses you might say:
+If asked "what's the difference between agent and subagent?":
+"An agent is an AgentDefinition — model, system prompt,
+tools, and skills. A subagent is one of those registered
+under our proxy's agents dictionary. The SDK's Agent tool
+lets the proxy delegate to a subagent based on intent."
+If asked "why not just a bigger prompt?":
+"Quality degrades as specialty count grows in one prompt.
+And we'd lose per-reply safety as a separate subagent —
+which is the non-negotiable gate."
+If asked "how is your COPPA pattern different?":
+"Most teams enforce kid-PII rules in code review.
+We enforce them in the schema. The hub_posts table has
+agent_name, agent_avatar, agent_title as immutable
+snapshot columns. There's no read path that JOINs users.
+The unsafe query can't be expressed."
+🎬 Don't read the whole table out loud — jump to the row that answers the question.</a:t>
             </a:r>
             <a:endParaRPr lang="en-US" dirty="0"/>
           </a:p>
@@ -1065,10 +1134,17 @@
           <a:p>
             <a:r>
               <a:rPr lang="en-US" dirty="0"/>
-              <a:t>SPEAKER NOTES (slide 2 — The moment)
-Pause 3 seconds after each line. Resist the urge to rush.
-This is the emotional anchor of the whole pitch.
-Everything technical that follows is in service of THIS moment.</a:t>
+              <a:t>🎤 SCRIPT · Slide 2 · The moment
+⏱ ~25 seconds · 5-min cut: KEEP
+"A five-year-old hands you a crayon drawing.
+[3-second pause]
+What if it became a story?
+[3-second pause]
+In her character. Her voice. Her world.
+[3-second pause]
+Everything technical I'm about to show you exists in service of that moment."
+🎬 Delivery: SLOW. The pauses are the slide. Don't fill the silence.
+➡ Transition: "But today's AI can't do this. Here's why."</a:t>
             </a:r>
             <a:endParaRPr lang="en-US" dirty="0"/>
           </a:p>
@@ -1156,9 +1232,17 @@
           <a:p>
             <a:r>
               <a:rPr lang="en-US" dirty="0"/>
-              <a:t>SPEAKER NOTES (slide 3 — OPTIONAL, drop for 3-min)
-Quick. Two columns. Don't dwell — the contrast does the work.
-Land on the bold line. Then move.</a:t>
+              <a:t>🎤 SCRIPT · Slide 3 · Today's AI fails kids
+⏱ ~20 seconds · 5-min cut: DEFAULT-CUT (optional)
+"Today's AI fails kids in two opposite ways.
+ChatGPT treats the kid as input — their drawing ignored,
+their character forgotten, their voice overridden.
+Image generators treat the kid as an object to replace —
+their drawing erased, their character redesigned.
+[brief pause]
+Existing AI extracts. We collaborate."
+🎬 Delivery: Quick. The contrast does the work. Don't dwell.
+➡ Transition: "Here's what we built instead."</a:t>
             </a:r>
             <a:endParaRPr lang="en-US" dirty="0"/>
           </a:p>
@@ -1246,10 +1330,21 @@
           <a:p>
             <a:r>
               <a:rPr lang="en-US" dirty="0"/>
-              <a:t>SPEAKER NOTES (slide 4 — Product intro)
-The product IS the agentic architecture wrapped in a buddy persona.
-Don't read the bullets — narrate over them.
-"Lightning the puppy" is sticky; use the name.</a:t>
+              <a:t>🎤 SCRIPT · Slide 4 · Meet My Agent
+⏱ ~30 seconds · 5-min cut: KEEP
+"Meet My Agent — a personal AI buddy the child names,
+customizes, and grows with.
+It RECOGNIZES their recurring characters. Lightning the
+puppy from last week is back.
+It ROUTES their requests to the right specialist.
+It PROTECTS every reply with a safety subagent before
+the child sees it.
+And it SHARES under the buddy's name — never the child's.
+COPPA by construction.
+One chat surface. Four specialists. One non-negotiable
+safety gate."
+🎬 Delivery: Don't read the bullets — narrate over them. Use "Lightning the puppy" by name; concrete sticks.
+➡ Transition: "Let me show you how we built it. We started simple."</a:t>
             </a:r>
             <a:endParaRPr lang="en-US" dirty="0"/>
           </a:p>
@@ -1337,9 +1432,22 @@
           <a:p>
             <a:r>
               <a:rPr lang="en-US" dirty="0"/>
-              <a:t>SPEAKER NOTES (slide 5 — Single-agent foundation)
-This is "how we started simple." The pitch arc is EVOLUTION — judges love seeing a team that started right-sized and grew when needed.
-Quick walk: Prompt design (versioned in git, not in code strings), Tools (MCP servers we wrote ourselves), MCP (the standard that made tool-calling actually clean), Skills (we gate features per child-agent via enabled_skills — that's the kid-safety layer at the affordance level).</a:t>
+              <a:t>🎤 SCRIPT · Slide 5 · Foundation — single agent
+⏱ ~35 seconds · 5-min cut: KEEP
+"We started simple — one agent, built right.
+Four primitives compose it, all on Claude Agent SDK.
+PROMPT DESIGN — markdown files versioned in git,
+not Python strings. Code-reviewable.
+TOOLS — custom MCP servers we wrote ourselves:
+vision analysis, vector search, safety check, TTS.
+MCP itself — tool calls become first-class
+agent affordances, not parsed-string hacks.
+SKILLS — composable behaviors with the @tool
+decorator, gated per agent via enabled_skills.
+One agent. No orchestrator yet. Just an LLM with
+the right scaffolding."
+🎬 Delivery: Point at each card as you name it. Don't read every word — narrate.
+➡ Transition: "And that single agent already gave us three properties kids felt."</a:t>
             </a:r>
             <a:endParaRPr lang="en-US" dirty="0"/>
           </a:p>
@@ -1427,12 +1535,21 @@
           <a:p>
             <a:r>
               <a:rPr lang="en-US" dirty="0"/>
-              <a:t>SPEAKER NOTES (slide 6 — Three properties)
-This is the "what good agentic feels like" slide. Each property has a concrete kid moment under it.
-Interactive = streaming SSE; not loading spinners, the story writes itself live.
-Proactive = the buddy suggests, recalls. NOT a Q&amp;A bot.
-Persistent = memory across sessions. Lightning the puppy you drew last week appears in this week's Kids Daily as the guest anchor.
-End with the line "already a real product" — that's the pivot before showing why one agent wasn't enough.</a:t>
+              <a:t>🎤 SCRIPT · Slide 6 · Three properties
+⏱ ~35 seconds · 5-min cut: KEEP
+"Three properties kids felt immediately.
+INTERACTIVE — Server-Sent Events stream the story
+token by token. The kid watches it write itself.
+'It's writing right now!'
+PROACTIVE — the buddy suggests next moves and
+recalls recurring characters across sessions.
+'Lightning the puppy is back!'
+PERSISTENT — character memory and agent memory
+survive across sessions. Same buddy persona,
+for life.
+One agent. Three properties. Already a real product."
+🎬 Delivery: End on "already a real product" — that's the pivot. Pause briefly. Then the next slide shows why one agent wasn't enough.
+➡ Transition: "But one agent hit a ceiling."</a:t>
             </a:r>
             <a:endParaRPr lang="en-US" dirty="0"/>
           </a:p>
@@ -1520,15 +1637,34 @@
           <a:p>
             <a:r>
               <a:rPr lang="en-US" dirty="0"/>
-              <a:t>SPEAKER NOTES (slide 7 — Multi-agent extension, the CENTERPIECE)
-Walk the diagram top to bottom. 30-40 seconds.
-1. "We extended — same SDK, new shape."
-2. "The proxy ORCHESTRATES — it routes the child's intent to the right specialist."
-3. "Four specialists, each with their own prompt, tools, and skill set."
-4. "Every reply passes through safety_review — that subagent is the non-negotiable gate."
-5. "And underneath everything, SHARED CONTEXT — persona, child_id, recurring characters — flows to every agent. So Lightning the puppy is the same dog in the story AS in the podcast."
-6. "Two more properties unlocked: responsive (right specialist in milliseconds) and dynamic (different experience per turn). And it's A2A extensible — new specialists plug in by registering one AgentDefinition."
-REBUILD THIS IN KEYNOTE with real shapes after import. The ASCII version is a placeholder.</a:t>
+              <a:t>🎤 SCRIPT · Slide 7 · Multi-agent team (CENTERPIECE)
+⏱ ~50 seconds · 5-min cut: KEEP
+"Branching adventures, daily podcasts, per-reply
+safety — each needed its own expertise. So we
+extended to an agent team. Still on Claude Agent SDK.
+[point at proxy node — top of diagram]
+The child's message comes in. The proxy ORCHESTRATES —
+routes the intent with deterministic rules plus LLM
+disambiguation.
+[point at the four specialists]
+Four specialists. Image story, interactive story,
+kids daily, audio narration. Each has its own prompt,
+tools, and skill set.
+[point at safety_review — pause for emphasis]
+Every reply passes through safety_review. That subagent
+is the non-negotiable gate before anything reaches
+the child.
+[point at the shared context bus]
+And underneath everything — SHARED CONTEXT. Persona,
+child ID, recurring characters — flows to every agent.
+So Lightning the puppy is the same dog in the story
+AS in the podcast.
+This unlocks responsive — right specialist in
+milliseconds. Dynamic — different experience per turn.
+And A2A extensible — new specialists plug in by
+registering one AgentDefinition."
+🎬 Delivery: This is the CENTERPIECE. Walk top-to-bottom. PAUSE after "before anything reaches the child" — let it land.
+➡ Transition: "These weren't accidents — every primitive earned its place."</a:t>
             </a:r>
             <a:endParaRPr lang="en-US" dirty="0"/>
           </a:p>
@@ -1616,15 +1752,24 @@
           <a:p>
             <a:r>
               <a:rPr lang="en-US" dirty="0"/>
-              <a:t>SPEAKER NOTES (slide 8 — Design decisions, NEW)
-This is the "we made decisions, not defaults" slide.
-Walk it row-by-row, ~7 seconds per row:
-1. Prompts: "We could have inlined prompts as Python strings. We chose markdown files in git — versioned, code-reviewable, age-stratified per file."
-2. Tools: "We could have called the API directly inside agent code. We chose custom MCP servers with typed envelopes — composable, testable, and the .handler convention lets us debug them."
-3. Skills: "We could have hardcoded behaviors. We chose enabled_skills as a field on AgentDefinition — per-age gating, A2A extensible, server-side gate."
-4. Multi-agent: "We could have used a bigger system prompt with branching. We chose a proxy + 4 subagents — each specialty isolated, safety subagent on EVERY reply, responsive routing."
-Close: "We didn't adopt defaults. Each row is a trade-off we made deliberately."
-DEFAULT-CUT FOR 5-MIN — keep for 6-min slot or technical-heavy judging panels.</a:t>
+              <a:t>🎤 SCRIPT · Slide 8 · Decisions, not defaults
+⏱ ~30 seconds · 5-min cut: DEFAULT-CUT (keep for 6-min slot)
+"Every primitive on the previous slides was a decision.
+PROMPTS — we could have inlined them as Python f-strings.
+We chose markdown files in git. Versioned. Code-reviewable.
+Age-stratified per file.
+TOOLS — we could have called the API directly inside
+agent code. We chose custom MCP servers with typed
+envelopes. Composable. Testable.
+SKILLS — we could have hardcoded behaviors per agent.
+We chose enabled_skills as a field on AgentDefinition —
+per-age gating, A2A extensible, server-side gate.
+MULTI-AGENT — we could have written a bigger prompt
+with branching. We chose a proxy plus four subagents.
+Each specialty isolated. Safety subagent on EVERY reply.
+We didn't adopt defaults."
+🎬 Delivery: Walk row by row, ~7 seconds each. Land hard on "We didn't adopt defaults."
+➡ Transition: "Three layers, six bets — here's where we innovate."</a:t>
             </a:r>
             <a:endParaRPr lang="en-US" dirty="0"/>
           </a:p>
@@ -1712,13 +1857,23 @@
           <a:p>
             <a:r>
               <a:rPr lang="en-US" dirty="0"/>
-              <a:t>SPEAKER NOTES (slide 8 — Innovation moats, NEW)
-This is the "we are not a wrapper" slide. Read each cell as a defensible claim, NOT a feature list.
-Walk it column-by-column, ~7 seconds per cell:
-- Agentic stack: "Multi-agent with shared state on the SDK — A2A extensible, so new specialists plug in by registering a single AgentDefinition."
-- Safety architecture: "Per-reply programmatic safety with age-aware thresholds — and COPPA enforced AT THE SCHEMA LEVEL. The unsafe JOIN can't even be expressed."
-- Kid experience: "Character continuity across surfaces — same Lightning the puppy from her drawing shows up in her interactive story, her podcast, her community feed. One buddy, many specialists, one identity."
-Land hard on: "Most ship ONE of these. We ship ALL SIX." Pause. Then move.</a:t>
+              <a:t>🎤 SCRIPT · Slide 9 · Innovation moats
+⏱ ~30 seconds · 5-min cut: KEEP
+"Three layers. Six specific bets.
+AGENTIC STACK — multi-agent with shared state on Claude
+Agent SDK. A2A extensible — new specialists plug in
+by registering one AgentDefinition.
+SAFETY ARCHITECTURE — per-reply programmatic safety,
+age-aware thresholds. And COPPA enforced AT THE SCHEMA
+LEVEL. The unsafe JOIN can't even be expressed.
+KID EXPERIENCE — character continuity across image,
+story, podcast, and community. One buddy, many
+specialists, one identity.
+[brief pause]
+Most kid-AI products ship ONE of these.
+We ship ALL SIX."
+🎬 Delivery: Read each cell as a defensible CLAIM, not a feature list. PAUSE before the closing line. Land hard on "all six."
+➡ Transition: "Here's what kids actually do."</a:t>
             </a:r>
             <a:endParaRPr lang="en-US" dirty="0"/>
           </a:p>

--- a/docs/pitch/keynote-deck.pptx
+++ b/docs/pitch/keynote-deck.pptx
@@ -18,10 +18,9 @@
     <p:sldId id="266" r:id="rId12"/>
     <p:sldId id="267" r:id="rId13"/>
     <p:sldId id="268" r:id="rId14"/>
-    <p:sldId id="269" r:id="rId15"/>
   </p:sldIdLst>
   <p:notesMasterIdLst>
-    <p:notesMasterId r:id="rId16"/>
+    <p:notesMasterId r:id="rId15"/>
   </p:notesMasterIdLst>
   <p:sldSz cx="12192000" cy="6858000"/>
   <p:notesSz cx="6858000" cy="12192000"/>
@@ -609,20 +608,21 @@
           <a:p>
             <a:r>
               <a:rPr lang="en-US" dirty="0"/>
-              <a:t>🎤 SCRIPT · Slide 10 · Product proof + demo beat
-⏱ ~35 seconds · 5-min cut: KEEP
-"You can see the buddy here — Dianna in this case —
-offering three starter prompts.
-Each one routes to a different specialist underneath.
-'Tell me a bedtime story' goes to image_story.
-'What's in the news for kids' goes to kids_daily.
-'Choose your own adventure' goes to interactive_story.
-One chat surface. The multi-agent team behind it.
-[OPTIONAL — 15-second live demo here. Open the app.
-Draw → buddy generates a story with their character.
-Pick ONE flow, not all four. Let it land.]"
-🎬 Delivery: Point at the hero screenshot. Read the 3 prompts. Make the mapping to specialists EXPLICIT — it's the proof of the slide-7 architecture.
-➡ Transition: "Here's where we are in shipping this."</a:t>
+              <a:t>🎤 SCRIPT · Slide 10 · Where we are
+⏱ ~25 seconds · 5-min cut: KEEP
+"Two hundred seventy-two stories shipped across
+three milestones.
+Phase 1 — MVP, single agent — done.
+Phase 2 — multi-agent team plus community — done.
+Phase 3 — video and parent dashboard — in design.
+Engineering rigor matters as much as features.
+Seven hundred contract tests. Per-reply programmatic
+safety. A silent safety-bypass we caught and fixed
+in twenty-four hours. A merge train of seven PRs
+landed last week.
+We don't pitch features — we ship them."
+🎬 Delivery: Speak the numbers slowly. "Two hundred seventy-two" beats "272/272" by a long way out loud. If you have real pilot numbers, replace the placeholder.
+➡ Transition: "And we own our bugs too."</a:t>
             </a:r>
             <a:endParaRPr lang="en-US" dirty="0"/>
           </a:p>
@@ -710,109 +710,7 @@
           <a:p>
             <a:r>
               <a:rPr lang="en-US" dirty="0"/>
-              <a:t>🎤 SCRIPT · Slide 11 · Where we are
-⏱ ~25 seconds · 5-min cut: KEEP
-"Two hundred seventy-two stories shipped across
-three milestones.
-Phase 1 — MVP, single agent — done.
-Phase 2 — multi-agent team plus community — done.
-Phase 3 — video and parent dashboard — in design.
-Engineering rigor matters as much as features.
-Seven hundred contract tests. Per-reply programmatic
-safety. A silent safety-bypass we caught and fixed
-in twenty-four hours. A merge train of seven PRs
-landed last week.
-We don't pitch features — we ship them."
-🎬 Delivery: Speak the numbers slowly. "Two hundred seventy-two" beats "272/272" by a long way out loud. If you have real pilot numbers, replace the placeholder.
-➡ Transition: "And we own our bugs too."</a:t>
-            </a:r>
-            <a:endParaRPr lang="en-US" dirty="0"/>
-          </a:p>
-        </p:txBody>
-      </p:sp>
-      <p:sp>
-        <p:nvSpPr>
-          <p:cNvPr id="4" name="Slide Number Placeholder 3"/>
-          <p:cNvSpPr>
-            <a:spLocks noGrp="1"/>
-          </p:cNvSpPr>
-          <p:nvPr>
-            <p:ph type="sldNum" sz="quarter" idx="10"/>
-          </p:nvPr>
-        </p:nvSpPr>
-        <p:spPr/>
-        <p:txBody>
-          <a:bodyPr/>
-          <a:lstStyle/>
-          <a:p>
-            <a:fld id="{F7021451-1387-4CA6-816F-3879F97B5CBC}" type="slidenum">
-              <a:rPr lang="en-US"/>
-              <a:t>11</a:t>
-            </a:fld>
-            <a:endParaRPr lang="en-US"/>
-          </a:p>
-        </p:txBody>
-      </p:sp>
-    </p:spTree>
-    <p:extLst>
-      <p:ext uri="{BB962C8B-B14F-4D97-AF65-F5344CB8AC3E}">
-        <p14:creationId xmlns:p14="http://schemas.microsoft.com/office/powerpoint/2010/main" val="1024086991"/>
-      </p:ext>
-    </p:extLst>
-  </p:cSld>
-  <p:clrMapOvr>
-    <a:masterClrMapping/>
-  </p:clrMapOvr>
-</p:notes>
-</file>
-
-<file path=ppt/notesSlides/notesSlide12.xml><?xml version="1.0" encoding="utf-8"?>
-<p:notes xmlns:a="http://schemas.openxmlformats.org/drawingml/2006/main" xmlns:r="http://schemas.openxmlformats.org/officeDocument/2006/relationships" xmlns:p="http://schemas.openxmlformats.org/presentationml/2006/main">
-  <p:cSld>
-    <p:spTree>
-      <p:nvGrpSpPr>
-        <p:cNvPr id="1" name=""/>
-        <p:cNvGrpSpPr/>
-        <p:nvPr/>
-      </p:nvGrpSpPr>
-      <p:grpSpPr>
-        <a:xfrm>
-          <a:off x="0" y="0"/>
-          <a:ext cx="0" cy="0"/>
-          <a:chOff x="0" y="0"/>
-          <a:chExt cx="0" cy="0"/>
-        </a:xfrm>
-      </p:grpSpPr>
-      <p:sp>
-        <p:nvSpPr>
-          <p:cNvPr id="2" name="Slide Image Placeholder 1"/>
-          <p:cNvSpPr>
-            <a:spLocks noGrp="1" noRot="1" noChangeAspect="1"/>
-          </p:cNvSpPr>
-          <p:nvPr>
-            <p:ph type="sldImg"/>
-          </p:nvPr>
-        </p:nvSpPr>
-        <p:spPr/>
-      </p:sp>
-      <p:sp>
-        <p:nvSpPr>
-          <p:cNvPr id="3" name="Notes Placeholder 2"/>
-          <p:cNvSpPr>
-            <a:spLocks noGrp="1"/>
-          </p:cNvSpPr>
-          <p:nvPr>
-            <p:ph type="body" idx="1"/>
-          </p:nvPr>
-        </p:nvSpPr>
-        <p:spPr/>
-        <p:txBody>
-          <a:bodyPr/>
-          <a:lstStyle/>
-          <a:p>
-            <a:r>
-              <a:rPr lang="en-US" dirty="0"/>
-              <a:t>🎤 SCRIPT · Slide 12 · Failures we owned
+              <a:t>🎤 SCRIPT · Slide 11 · Failures we owned
 ⏱ ~30 seconds · 5-min cut: DEFAULT-CUT (keep for 6-min slot)
 "And we own our bugs.
 We tried the SDK subprocess for image-to-story.
@@ -853,7 +751,7 @@
           <a:p>
             <a:fld id="{F7021451-1387-4CA6-816F-3879F97B5CBC}" type="slidenum">
               <a:rPr lang="en-US"/>
-              <a:t>12</a:t>
+              <a:t>11</a:t>
             </a:fld>
             <a:endParaRPr lang="en-US"/>
           </a:p>
@@ -872,7 +770,7 @@
 </p:notes>
 </file>
 
-<file path=ppt/notesSlides/notesSlide13.xml><?xml version="1.0" encoding="utf-8"?>
+<file path=ppt/notesSlides/notesSlide12.xml><?xml version="1.0" encoding="utf-8"?>
 <p:notes xmlns:a="http://schemas.openxmlformats.org/drawingml/2006/main" xmlns:r="http://schemas.openxmlformats.org/officeDocument/2006/relationships" xmlns:p="http://schemas.openxmlformats.org/presentationml/2006/main">
   <p:cSld>
     <p:spTree>
@@ -918,7 +816,7 @@
           <a:p>
             <a:r>
               <a:rPr lang="en-US" dirty="0"/>
-              <a:t>🎤 SCRIPT · Slide 13 · Why this matters (CLOSING BOOKEND)
+              <a:t>🎤 SCRIPT · Slide 12 · Why this matters (CLOSING BOOKEND)
 ⏱ ~25 seconds · 5-min cut: KEEP
 "Why this matters.
 Agentic from day one — not a wrapper, not a prompt.
@@ -959,7 +857,7 @@
           <a:p>
             <a:fld id="{F7021451-1387-4CA6-816F-3879F97B5CBC}" type="slidenum">
               <a:rPr lang="en-US"/>
-              <a:t>13</a:t>
+              <a:t>12</a:t>
             </a:fld>
             <a:endParaRPr lang="en-US"/>
           </a:p>
@@ -978,7 +876,7 @@
 </p:notes>
 </file>
 
-<file path=ppt/notesSlides/notesSlide14.xml><?xml version="1.0" encoding="utf-8"?>
+<file path=ppt/notesSlides/notesSlide13.xml><?xml version="1.0" encoding="utf-8"?>
 <p:notes xmlns:a="http://schemas.openxmlformats.org/drawingml/2006/main" xmlns:r="http://schemas.openxmlformats.org/officeDocument/2006/relationships" xmlns:p="http://schemas.openxmlformats.org/presentationml/2006/main">
   <p:cSld>
     <p:spTree>
@@ -1024,7 +922,7 @@
           <a:p>
             <a:r>
               <a:rPr lang="en-US" dirty="0"/>
-              <a:t>🎤 SCRIPT · Slide 14 · Appendix (Q&amp;A backup, HIDDEN BY DEFAULT)
+              <a:t>🎤 SCRIPT · Slide 13 · Appendix (Q&amp;A backup, HIDDEN BY DEFAULT)
 ⏱ Variable · Only reveal during Q&amp;A
 This slide should be HIDDEN during the main presentation:
 Keynote → right-click slide thumbnail → Skip Slide
@@ -1069,7 +967,7 @@
           <a:p>
             <a:fld id="{F7021451-1387-4CA6-816F-3879F97B5CBC}" type="slidenum">
               <a:rPr lang="en-US"/>
-              <a:t>14</a:t>
+              <a:t>13</a:t>
             </a:fld>
             <a:endParaRPr lang="en-US"/>
           </a:p>
@@ -1134,17 +1032,22 @@
           <a:p>
             <a:r>
               <a:rPr lang="en-US" dirty="0"/>
-              <a:t>🎤 SCRIPT · Slide 2 · The moment
-⏱ ~25 seconds · 5-min cut: KEEP
-"A five-year-old hands you a crayon drawing.
+              <a:t>🎤 SCRIPT · Slide 2 · Three moments
+⏱ ~28 seconds · 5-min cut: KEEP
+"Three moments — one buddy.
+[2-second pause]
+A five-year-old hands her drawing to her buddy.
+It becomes a story — in her character, her voice.
+[2-second pause]
+The same character stars in the next adventure —
+her choices, her ending.
+[2-second pause]
+Tomorrow's news arrives as her podcast —
+kid-safe, in her buddy's voice.
 [3-second pause]
-What if it became a story?
-[3-second pause]
-In her character. Her voice. Her world.
-[3-second pause]
-Everything technical I'm about to show you exists in service of that moment."
-🎬 Delivery: SLOW. The pauses are the slide. Don't fill the silence.
-➡ Transition: "But today's AI can't do this. Here's why."</a:t>
+One buddy. Three kinds of moments. Her world, every time."
+🎬 Delivery: SLOW. Three product moments, three deliberate pauses. The cadence is the slide.
+➡ Transition: "But today's AI fails her on every one of those moments. Here's how."</a:t>
             </a:r>
             <a:endParaRPr lang="en-US" dirty="0"/>
           </a:p>
@@ -1232,17 +1135,23 @@
           <a:p>
             <a:r>
               <a:rPr lang="en-US" dirty="0"/>
-              <a:t>🎤 SCRIPT · Slide 3 · Today's AI fails kids
-⏱ ~20 seconds · 5-min cut: DEFAULT-CUT (optional)
-"Today's AI fails kids in two opposite ways.
-ChatGPT treats the kid as input — their drawing ignored,
-their character forgotten, their voice overridden.
-Image generators treat the kid as an object to replace —
-their drawing erased, their character redesigned.
+              <a:t>🎤 SCRIPT · Slide 3 · Four problems
+⏱ ~28 seconds · 5-min cut: KEEP
+"Today's AI fails kids on four fronts.
+NOT PERSONALIZED ENOUGH — generic outputs.
+No memory of her characters, her voice, her age.
+NOT HIGHLY CUSTOMIZED — every child gets the
+same prompt and same answer. No buddy identity.
+No per-child capability set.
+NO SUITED NEWS FOR KIDS — today's news products
+are adult-first. No age-aware filter, no narrative
+voice for kids.
+NO LONG-TERM PERSISTENCE — each session resets.
+Lightning the puppy is forgotten by Monday.
 [brief pause]
 Existing AI extracts. We collaborate."
-🎬 Delivery: Quick. The contrast does the work. Don't dwell.
-➡ Transition: "Here's what we built instead."</a:t>
+🎬 Delivery: Read each problem deliberately. The 4-card grid does the work; don't editorialize.
+➡ Transition: "Here's how our agent's abilities solve each one."</a:t>
             </a:r>
             <a:endParaRPr lang="en-US" dirty="0"/>
           </a:p>
@@ -1330,21 +1239,30 @@
           <a:p>
             <a:r>
               <a:rPr lang="en-US" dirty="0"/>
-              <a:t>🎤 SCRIPT · Slide 4 · Meet My Agent
-⏱ ~30 seconds · 5-min cut: KEEP
-"Meet My Agent — a personal AI buddy the child names,
-customizes, and grows with.
-It RECOGNIZES their recurring characters. Lightning the
-puppy from last week is back.
-It ROUTES their requests to the right specialist.
-It PROTECTS every reply with a safety subagent before
-the child sees it.
-And it SHARES under the buddy's name — never the child's.
-COPPA by construction.
-One chat surface. Four specialists. One non-negotiable
-safety gate."
-🎬 Delivery: Don't read the bullets — narrate over them. Use "Lightning the puppy" by name; concrete sticks.
-➡ Transition: "Let me show you how we built it. We started simple."</a:t>
+              <a:t>🎤 SCRIPT · Slide 4 · Our agent's abilities
+⏱ ~35 seconds · 5-min cut: KEEP
+"Four problems. Four agent abilities — one for each.
+NOT PERSONALIZED → PERSONA + CHARACTER MEMORY.
+The buddy is named and customized. Recurring
+characters — Lightning the puppy — are recalled
+across sessions through character_repo.
+NOT HIGHLY CUSTOMIZED → PER-CHILD AGENT DEFINITION
+WITH SKILLS GATING. Age-aware capabilities for
+three to five, six to eight, nine to twelve. The
+buddy persona is shared as system context to
+every specialist.
+NO KID-NEWS → THE KIDS_DAILY SPECIALIST.
+Age-stratified prompts plus per-reply safety review.
+News arrives as a kid-safe podcast in the buddy's voice.
+NO PERSISTENCE → AGENT_REPO + CHARACTER_REPO +
+VECTOR SEARCH. The buddy survives every session.
+One buddy. For life.
+And kids feel three things immediately:
+interactive — the story streams as it writes itself.
+Proactive — the buddy suggests and recalls.
+Persistent — same buddy persona, every time."
+🎬 Delivery: Read each row tightly — problem then ability. The 1-to-1 mapping does the work.
+➡ Transition: "These abilities are built on four SDK primitives."</a:t>
             </a:r>
             <a:endParaRPr lang="en-US" dirty="0"/>
           </a:p>
@@ -1447,7 +1365,7 @@
 One agent. No orchestrator yet. Just an LLM with
 the right scaffolding."
 🎬 Delivery: Point at each card as you name it. Don't read every word — narrate.
-➡ Transition: "And that single agent already gave us three properties kids felt."</a:t>
+➡ Transition: "One agent hit a ceiling. So we extended to a team."</a:t>
             </a:r>
             <a:endParaRPr lang="en-US" dirty="0"/>
           </a:p>
@@ -1535,109 +1453,7 @@
           <a:p>
             <a:r>
               <a:rPr lang="en-US" dirty="0"/>
-              <a:t>🎤 SCRIPT · Slide 6 · Three properties
-⏱ ~35 seconds · 5-min cut: KEEP
-"Three properties kids felt immediately.
-INTERACTIVE — Server-Sent Events stream the story
-token by token. The kid watches it write itself.
-'It's writing right now!'
-PROACTIVE — the buddy suggests next moves and
-recalls recurring characters across sessions.
-'Lightning the puppy is back!'
-PERSISTENT — character memory and agent memory
-survive across sessions. Same buddy persona,
-for life.
-One agent. Three properties. Already a real product."
-🎬 Delivery: End on "already a real product" — that's the pivot. Pause briefly. Then the next slide shows why one agent wasn't enough.
-➡ Transition: "But one agent hit a ceiling."</a:t>
-            </a:r>
-            <a:endParaRPr lang="en-US" dirty="0"/>
-          </a:p>
-        </p:txBody>
-      </p:sp>
-      <p:sp>
-        <p:nvSpPr>
-          <p:cNvPr id="4" name="Slide Number Placeholder 3"/>
-          <p:cNvSpPr>
-            <a:spLocks noGrp="1"/>
-          </p:cNvSpPr>
-          <p:nvPr>
-            <p:ph type="sldNum" sz="quarter" idx="10"/>
-          </p:nvPr>
-        </p:nvSpPr>
-        <p:spPr/>
-        <p:txBody>
-          <a:bodyPr/>
-          <a:lstStyle/>
-          <a:p>
-            <a:fld id="{F7021451-1387-4CA6-816F-3879F97B5CBC}" type="slidenum">
-              <a:rPr lang="en-US"/>
-              <a:t>6</a:t>
-            </a:fld>
-            <a:endParaRPr lang="en-US"/>
-          </a:p>
-        </p:txBody>
-      </p:sp>
-    </p:spTree>
-    <p:extLst>
-      <p:ext uri="{BB962C8B-B14F-4D97-AF65-F5344CB8AC3E}">
-        <p14:creationId xmlns:p14="http://schemas.microsoft.com/office/powerpoint/2010/main" val="1024086991"/>
-      </p:ext>
-    </p:extLst>
-  </p:cSld>
-  <p:clrMapOvr>
-    <a:masterClrMapping/>
-  </p:clrMapOvr>
-</p:notes>
-</file>
-
-<file path=ppt/notesSlides/notesSlide7.xml><?xml version="1.0" encoding="utf-8"?>
-<p:notes xmlns:a="http://schemas.openxmlformats.org/drawingml/2006/main" xmlns:r="http://schemas.openxmlformats.org/officeDocument/2006/relationships" xmlns:p="http://schemas.openxmlformats.org/presentationml/2006/main">
-  <p:cSld>
-    <p:spTree>
-      <p:nvGrpSpPr>
-        <p:cNvPr id="1" name=""/>
-        <p:cNvGrpSpPr/>
-        <p:nvPr/>
-      </p:nvGrpSpPr>
-      <p:grpSpPr>
-        <a:xfrm>
-          <a:off x="0" y="0"/>
-          <a:ext cx="0" cy="0"/>
-          <a:chOff x="0" y="0"/>
-          <a:chExt cx="0" cy="0"/>
-        </a:xfrm>
-      </p:grpSpPr>
-      <p:sp>
-        <p:nvSpPr>
-          <p:cNvPr id="2" name="Slide Image Placeholder 1"/>
-          <p:cNvSpPr>
-            <a:spLocks noGrp="1" noRot="1" noChangeAspect="1"/>
-          </p:cNvSpPr>
-          <p:nvPr>
-            <p:ph type="sldImg"/>
-          </p:nvPr>
-        </p:nvSpPr>
-        <p:spPr/>
-      </p:sp>
-      <p:sp>
-        <p:nvSpPr>
-          <p:cNvPr id="3" name="Notes Placeholder 2"/>
-          <p:cNvSpPr>
-            <a:spLocks noGrp="1"/>
-          </p:cNvSpPr>
-          <p:nvPr>
-            <p:ph type="body" idx="1"/>
-          </p:nvPr>
-        </p:nvSpPr>
-        <p:spPr/>
-        <p:txBody>
-          <a:bodyPr/>
-          <a:lstStyle/>
-          <a:p>
-            <a:r>
-              <a:rPr lang="en-US" dirty="0"/>
-              <a:t>🎤 SCRIPT · Slide 7 · Multi-agent team (CENTERPIECE)
+              <a:t>🎤 SCRIPT · Slide 6 · The team (CENTERPIECE)
 ⏱ ~50 seconds · 5-min cut: KEEP
 "Branching adventures, daily podcasts, per-reply
 safety — each needed its own expertise. So we
@@ -1687,7 +1503,7 @@
           <a:p>
             <a:fld id="{F7021451-1387-4CA6-816F-3879F97B5CBC}" type="slidenum">
               <a:rPr lang="en-US"/>
-              <a:t>7</a:t>
+              <a:t>6</a:t>
             </a:fld>
             <a:endParaRPr lang="en-US"/>
           </a:p>
@@ -1706,7 +1522,7 @@
 </p:notes>
 </file>
 
-<file path=ppt/notesSlides/notesSlide8.xml><?xml version="1.0" encoding="utf-8"?>
+<file path=ppt/notesSlides/notesSlide7.xml><?xml version="1.0" encoding="utf-8"?>
 <p:notes xmlns:a="http://schemas.openxmlformats.org/drawingml/2006/main" xmlns:r="http://schemas.openxmlformats.org/officeDocument/2006/relationships" xmlns:p="http://schemas.openxmlformats.org/presentationml/2006/main">
   <p:cSld>
     <p:spTree>
@@ -1752,7 +1568,7 @@
           <a:p>
             <a:r>
               <a:rPr lang="en-US" dirty="0"/>
-              <a:t>🎤 SCRIPT · Slide 8 · Decisions, not defaults
+              <a:t>🎤 SCRIPT · Slide 7 · Why this shape (rationale)
 ⏱ ~30 seconds · 5-min cut: DEFAULT-CUT (keep for 6-min slot)
 "Every primitive on the previous slides was a decision.
 PROMPTS — we could have inlined them as Python f-strings.
@@ -1792,6 +1608,110 @@
           <a:p>
             <a:fld id="{F7021451-1387-4CA6-816F-3879F97B5CBC}" type="slidenum">
               <a:rPr lang="en-US"/>
+              <a:t>7</a:t>
+            </a:fld>
+            <a:endParaRPr lang="en-US"/>
+          </a:p>
+        </p:txBody>
+      </p:sp>
+    </p:spTree>
+    <p:extLst>
+      <p:ext uri="{BB962C8B-B14F-4D97-AF65-F5344CB8AC3E}">
+        <p14:creationId xmlns:p14="http://schemas.microsoft.com/office/powerpoint/2010/main" val="1024086991"/>
+      </p:ext>
+    </p:extLst>
+  </p:cSld>
+  <p:clrMapOvr>
+    <a:masterClrMapping/>
+  </p:clrMapOvr>
+</p:notes>
+</file>
+
+<file path=ppt/notesSlides/notesSlide8.xml><?xml version="1.0" encoding="utf-8"?>
+<p:notes xmlns:a="http://schemas.openxmlformats.org/drawingml/2006/main" xmlns:r="http://schemas.openxmlformats.org/officeDocument/2006/relationships" xmlns:p="http://schemas.openxmlformats.org/presentationml/2006/main">
+  <p:cSld>
+    <p:spTree>
+      <p:nvGrpSpPr>
+        <p:cNvPr id="1" name=""/>
+        <p:cNvGrpSpPr/>
+        <p:nvPr/>
+      </p:nvGrpSpPr>
+      <p:grpSpPr>
+        <a:xfrm>
+          <a:off x="0" y="0"/>
+          <a:ext cx="0" cy="0"/>
+          <a:chOff x="0" y="0"/>
+          <a:chExt cx="0" cy="0"/>
+        </a:xfrm>
+      </p:grpSpPr>
+      <p:sp>
+        <p:nvSpPr>
+          <p:cNvPr id="2" name="Slide Image Placeholder 1"/>
+          <p:cNvSpPr>
+            <a:spLocks noGrp="1" noRot="1" noChangeAspect="1"/>
+          </p:cNvSpPr>
+          <p:nvPr>
+            <p:ph type="sldImg"/>
+          </p:nvPr>
+        </p:nvSpPr>
+        <p:spPr/>
+      </p:sp>
+      <p:sp>
+        <p:nvSpPr>
+          <p:cNvPr id="3" name="Notes Placeholder 2"/>
+          <p:cNvSpPr>
+            <a:spLocks noGrp="1"/>
+          </p:cNvSpPr>
+          <p:nvPr>
+            <p:ph type="body" idx="1"/>
+          </p:nvPr>
+        </p:nvSpPr>
+        <p:spPr/>
+        <p:txBody>
+          <a:bodyPr/>
+          <a:lstStyle/>
+          <a:p>
+            <a:r>
+              <a:rPr lang="en-US" dirty="0"/>
+              <a:t>🎤 SCRIPT · Slide 8 · What's good about it (moats)
+⏱ ~30 seconds · 5-min cut: KEEP
+"Three layers. Six specific bets.
+AGENTIC STACK — multi-agent with shared state on Claude
+Agent SDK. A2A extensible — new specialists plug in
+by registering one AgentDefinition.
+SAFETY ARCHITECTURE — per-reply programmatic safety,
+age-aware thresholds. And COPPA enforced AT THE SCHEMA
+LEVEL. The unsafe JOIN can't even be expressed.
+KID EXPERIENCE — character continuity across image,
+story, podcast, and community. One buddy, many
+specialists, one identity.
+[brief pause]
+Most kid-AI products ship ONE of these.
+We ship ALL SIX."
+🎬 Delivery: Read each cell as a defensible CLAIM, not a feature list. PAUSE before the closing line. Land hard on "all six."
+➡ Transition: "Here's what kids actually do."</a:t>
+            </a:r>
+            <a:endParaRPr lang="en-US" dirty="0"/>
+          </a:p>
+        </p:txBody>
+      </p:sp>
+      <p:sp>
+        <p:nvSpPr>
+          <p:cNvPr id="4" name="Slide Number Placeholder 3"/>
+          <p:cNvSpPr>
+            <a:spLocks noGrp="1"/>
+          </p:cNvSpPr>
+          <p:nvPr>
+            <p:ph type="sldNum" sz="quarter" idx="10"/>
+          </p:nvPr>
+        </p:nvSpPr>
+        <p:spPr/>
+        <p:txBody>
+          <a:bodyPr/>
+          <a:lstStyle/>
+          <a:p>
+            <a:fld id="{F7021451-1387-4CA6-816F-3879F97B5CBC}" type="slidenum">
+              <a:rPr lang="en-US"/>
               <a:t>8</a:t>
             </a:fld>
             <a:endParaRPr lang="en-US"/>
@@ -1857,23 +1777,20 @@
           <a:p>
             <a:r>
               <a:rPr lang="en-US" dirty="0"/>
-              <a:t>🎤 SCRIPT · Slide 9 · Innovation moats
-⏱ ~30 seconds · 5-min cut: KEEP
-"Three layers. Six specific bets.
-AGENTIC STACK — multi-agent with shared state on Claude
-Agent SDK. A2A extensible — new specialists plug in
-by registering one AgentDefinition.
-SAFETY ARCHITECTURE — per-reply programmatic safety,
-age-aware thresholds. And COPPA enforced AT THE SCHEMA
-LEVEL. The unsafe JOIN can't even be expressed.
-KID EXPERIENCE — character continuity across image,
-story, podcast, and community. One buddy, many
-specialists, one identity.
-[brief pause]
-Most kid-AI products ship ONE of these.
-We ship ALL SIX."
-🎬 Delivery: Read each cell as a defensible CLAIM, not a feature list. PAUSE before the closing line. Land hard on "all six."
-➡ Transition: "Here's what kids actually do."</a:t>
+              <a:t>🎤 SCRIPT · Slide 9 · Product proof + demo beat
+⏱ ~35 seconds · 5-min cut: KEEP
+"You can see the buddy here — Dianna in this case —
+offering three starter prompts.
+Each one routes to a different specialist underneath.
+'Tell me a bedtime story' goes to image_story.
+'What's in the news for kids' goes to kids_daily.
+'Choose your own adventure' goes to interactive_story.
+One chat surface. The multi-agent team behind it.
+[OPTIONAL — 15-second live demo here. Open the app.
+Draw → buddy generates a story with their character.
+Pick ONE flow, not all four. Let it land.]"
+🎬 Delivery: Point at the hero screenshot. Read the 3 prompts. Make the mapping to specialists EXPLICIT — it's the proof of the slide-7 architecture.
+➡ Transition: "Here's where we are in shipping this."</a:t>
             </a:r>
             <a:endParaRPr lang="en-US" dirty="0"/>
           </a:p>
@@ -2381,45 +2298,6 @@
 <file path=ppt/slides/slide13.xml><?xml version="1.0" encoding="utf-8"?>
 <p:sld xmlns:a="http://schemas.openxmlformats.org/drawingml/2006/main" xmlns:r="http://schemas.openxmlformats.org/officeDocument/2006/relationships" xmlns:p="http://schemas.openxmlformats.org/presentationml/2006/main">
   <p:cSld name="Slide 13">
-    <p:bg>
-      <p:bgPr>
-        <a:blipFill dpi="0" rotWithShape="1">
-          <a:blip r:embed="rId1">
-            <a:lum/>
-          </a:blip>
-          <a:srcRect/>
-          <a:stretch>
-            <a:fillRect/>
-          </a:stretch>
-        </a:blipFill>
-        <a:effectLst/>
-      </p:bgPr>
-    </p:bg>
-    <p:spTree>
-      <p:nvGrpSpPr>
-        <p:cNvPr id="1" name=""/>
-        <p:cNvGrpSpPr/>
-        <p:nvPr/>
-      </p:nvGrpSpPr>
-      <p:grpSpPr>
-        <a:xfrm>
-          <a:off x="0" y="0"/>
-          <a:ext cx="0" cy="0"/>
-          <a:chOff x="0" y="0"/>
-          <a:chExt cx="0" cy="0"/>
-        </a:xfrm>
-      </p:grpSpPr>
-    </p:spTree>
-  </p:cSld>
-  <p:clrMapOvr>
-    <a:masterClrMapping/>
-  </p:clrMapOvr>
-</p:sld>
-</file>
-
-<file path=ppt/slides/slide14.xml><?xml version="1.0" encoding="utf-8"?>
-<p:sld xmlns:a="http://schemas.openxmlformats.org/drawingml/2006/main" xmlns:r="http://schemas.openxmlformats.org/officeDocument/2006/relationships" xmlns:p="http://schemas.openxmlformats.org/presentationml/2006/main">
-  <p:cSld name="Slide 14">
     <p:bg>
       <p:bgPr>
         <a:blipFill dpi="0" rotWithShape="1">

--- a/docs/pitch/keynote-deck.pptx
+++ b/docs/pitch/keynote-deck.pptx
@@ -1350,21 +1350,28 @@
           <a:p>
             <a:r>
               <a:rPr lang="en-US" dirty="0"/>
-              <a:t>🎤 SCRIPT · Slide 5 · Foundation — single agent
-⏱ ~35 seconds · 5-min cut: KEEP
-"We started simple — one agent, built right.
-Four primitives compose it, all on Claude Agent SDK.
-PROMPT DESIGN — markdown files versioned in git,
-not Python strings. Code-reviewable.
-TOOLS — custom MCP servers we wrote ourselves:
-vision analysis, vector search, safety check, TTS.
-MCP itself — tool calls become first-class
-agent affordances, not parsed-string hacks.
-SKILLS — composable behaviors with the @tool
-decorator, gated per agent via enabled_skills.
-One agent. No orchestrator yet. Just an LLM with
-the right scaffolding."
-🎬 Delivery: Point at each card as you name it. Don't read every word — narrate.
+              <a:t>🎤 SCRIPT · Slide 5 · Six agentic features
+⏱ ~40 seconds · 5-min cut: KEEP
+"Six agentic features. One stack.
+INTERACTIVE — streaming SSE plus async-generator
+agents. The story writes itself token by token.
+RESPONSIVE — Claude Haiku for speed, deterministic
+plus LLM-disambiguating intent routing, per-agent
+skill curation.
+PROACTIVE — prompt engineering shapes the buddy's
+starter suggestions; vector DB recall surfaces
+recurring characters; character_repo proposes next
+moves.
+PERSISTENT — vector DB plus SQL repos hold the
+buddy across sessions. ChromaDB locally, pgvector
+in production.
+REACTIVE — every reply runs through the safety MCP
+tool. Age-aware thresholds: 0.90 for three to five,
+0.85 for six to twelve. Suggest-and-retry on fail.
+AUTONOMOUS — this one's the next frontier.
+Multi-step planning, self-prompted explore loops,
+scheduled buddy initiatives. One ceiling away."
+🎬 Delivery: Walk row-by-row. Linger on REACTIVE (the safety story). Mark AUTONOMOUS as future explicitly so judges don't think you're claiming it.
 ➡ Transition: "One agent hit a ceiling. So we extended to a team."</a:t>
             </a:r>
             <a:endParaRPr lang="en-US" dirty="0"/>

--- a/docs/pitch/keynote-deck.pptx
+++ b/docs/pitch/keynote-deck.pptx
@@ -18,9 +18,11 @@
     <p:sldId id="266" r:id="rId12"/>
     <p:sldId id="267" r:id="rId13"/>
     <p:sldId id="268" r:id="rId14"/>
+    <p:sldId id="269" r:id="rId15"/>
+    <p:sldId id="270" r:id="rId16"/>
   </p:sldIdLst>
   <p:notesMasterIdLst>
-    <p:notesMasterId r:id="rId15"/>
+    <p:notesMasterId r:id="rId17"/>
   </p:notesMasterIdLst>
   <p:sldSz cx="12192000" cy="6858000"/>
   <p:notesSz cx="6858000" cy="12192000"/>
@@ -608,21 +610,23 @@
           <a:p>
             <a:r>
               <a:rPr lang="en-US" dirty="0"/>
-              <a:t>🎤 SCRIPT · Slide 10 · Where we are
-⏱ ~25 seconds · 5-min cut: KEEP
-"Two hundred seventy-two stories shipped across
-three milestones.
-Phase 1 — MVP, single agent — done.
-Phase 2 — multi-agent team plus community — done.
-Phase 3 — video and parent dashboard — in design.
-Engineering rigor matters as much as features.
-Seven hundred contract tests. Per-reply programmatic
-safety. A silent safety-bypass we caught and fixed
-in twenty-four hours. A merge train of seven PRs
-landed last week.
-We don't pitch features — we ship them."
-🎬 Delivery: Speak the numbers slowly. "Two hundred seventy-two" beats "272/272" by a long way out loud. If you have real pilot numbers, replace the placeholder.
-➡ Transition: "And we own our bugs too."</a:t>
+              <a:t>🎤 SCRIPT · Slide 10 · What's good about it (moats)
+⏱ ~30 seconds · 5-min cut: KEEP
+"Three layers. Six specific bets.
+AGENTIC STACK — multi-agent with shared state on Claude
+Agent SDK. A2A extensible — new specialists plug in
+by registering one AgentDefinition.
+SAFETY ARCHITECTURE — per-reply programmatic safety,
+age-aware thresholds. And COPPA enforced AT THE SCHEMA
+LEVEL. The unsafe JOIN can't even be expressed.
+KID EXPERIENCE — character continuity across image,
+story, podcast, and community. One buddy, many
+specialists, one identity.
+[brief pause]
+Most kid-AI products ship ONE of these.
+We ship ALL SIX."
+🎬 Delivery: Read each cell as a defensible CLAIM, not a feature list. PAUSE before the closing line. Land hard on "all six."
+➡ Transition: "Here's what kids actually do."</a:t>
             </a:r>
             <a:endParaRPr lang="en-US" dirty="0"/>
           </a:p>
@@ -710,7 +714,210 @@
           <a:p>
             <a:r>
               <a:rPr lang="en-US" dirty="0"/>
-              <a:t>🎤 SCRIPT · Slide 11 · Failures we owned
+              <a:t>🎤 SCRIPT · Slide 11 · Product proof + demo beat
+⏱ ~35 seconds · 5-min cut: KEEP
+"You can see the buddy here — Dianna in this case —
+offering three starter prompts.
+Each one routes to a different specialist underneath.
+'Tell me a bedtime story' goes to image_story.
+'What's in the news for kids' goes to kids_daily.
+'Choose your own adventure' goes to interactive_story.
+One chat surface. The multi-agent team behind it.
+[OPTIONAL — 15-second live demo here. Open the app.
+Draw → buddy generates a story with their character.
+Pick ONE flow, not all four. Let it land.]"
+🎬 Delivery: Point at the hero screenshot. Read the 3 prompts. Make the mapping to specialists EXPLICIT — it's the proof of the slide-7 architecture.
+➡ Transition: "Here's where we are in shipping this."</a:t>
+            </a:r>
+            <a:endParaRPr lang="en-US" dirty="0"/>
+          </a:p>
+        </p:txBody>
+      </p:sp>
+      <p:sp>
+        <p:nvSpPr>
+          <p:cNvPr id="4" name="Slide Number Placeholder 3"/>
+          <p:cNvSpPr>
+            <a:spLocks noGrp="1"/>
+          </p:cNvSpPr>
+          <p:nvPr>
+            <p:ph type="sldNum" sz="quarter" idx="10"/>
+          </p:nvPr>
+        </p:nvSpPr>
+        <p:spPr/>
+        <p:txBody>
+          <a:bodyPr/>
+          <a:lstStyle/>
+          <a:p>
+            <a:fld id="{F7021451-1387-4CA6-816F-3879F97B5CBC}" type="slidenum">
+              <a:rPr lang="en-US"/>
+              <a:t>11</a:t>
+            </a:fld>
+            <a:endParaRPr lang="en-US"/>
+          </a:p>
+        </p:txBody>
+      </p:sp>
+    </p:spTree>
+    <p:extLst>
+      <p:ext uri="{BB962C8B-B14F-4D97-AF65-F5344CB8AC3E}">
+        <p14:creationId xmlns:p14="http://schemas.microsoft.com/office/powerpoint/2010/main" val="1024086991"/>
+      </p:ext>
+    </p:extLst>
+  </p:cSld>
+  <p:clrMapOvr>
+    <a:masterClrMapping/>
+  </p:clrMapOvr>
+</p:notes>
+</file>
+
+<file path=ppt/notesSlides/notesSlide12.xml><?xml version="1.0" encoding="utf-8"?>
+<p:notes xmlns:a="http://schemas.openxmlformats.org/drawingml/2006/main" xmlns:r="http://schemas.openxmlformats.org/officeDocument/2006/relationships" xmlns:p="http://schemas.openxmlformats.org/presentationml/2006/main">
+  <p:cSld>
+    <p:spTree>
+      <p:nvGrpSpPr>
+        <p:cNvPr id="1" name=""/>
+        <p:cNvGrpSpPr/>
+        <p:nvPr/>
+      </p:nvGrpSpPr>
+      <p:grpSpPr>
+        <a:xfrm>
+          <a:off x="0" y="0"/>
+          <a:ext cx="0" cy="0"/>
+          <a:chOff x="0" y="0"/>
+          <a:chExt cx="0" cy="0"/>
+        </a:xfrm>
+      </p:grpSpPr>
+      <p:sp>
+        <p:nvSpPr>
+          <p:cNvPr id="2" name="Slide Image Placeholder 1"/>
+          <p:cNvSpPr>
+            <a:spLocks noGrp="1" noRot="1" noChangeAspect="1"/>
+          </p:cNvSpPr>
+          <p:nvPr>
+            <p:ph type="sldImg"/>
+          </p:nvPr>
+        </p:nvSpPr>
+        <p:spPr/>
+      </p:sp>
+      <p:sp>
+        <p:nvSpPr>
+          <p:cNvPr id="3" name="Notes Placeholder 2"/>
+          <p:cNvSpPr>
+            <a:spLocks noGrp="1"/>
+          </p:cNvSpPr>
+          <p:nvPr>
+            <p:ph type="body" idx="1"/>
+          </p:nvPr>
+        </p:nvSpPr>
+        <p:spPr/>
+        <p:txBody>
+          <a:bodyPr/>
+          <a:lstStyle/>
+          <a:p>
+            <a:r>
+              <a:rPr lang="en-US" dirty="0"/>
+              <a:t>🎤 SCRIPT · Slide 12 · Where we are
+⏱ ~25 seconds · 5-min cut: KEEP
+"Two hundred seventy-two stories shipped across
+three milestones.
+Phase 1 — MVP, single agent — done.
+Phase 2 — multi-agent team plus community — done.
+Phase 3 — video and parent dashboard — in design.
+Engineering rigor matters as much as features.
+Seven hundred contract tests. Per-reply programmatic
+safety. A silent safety-bypass we caught and fixed
+in twenty-four hours. A merge train of seven PRs
+landed last week.
+We don't pitch features — we ship them."
+🎬 Delivery: Speak the numbers slowly. "Two hundred seventy-two" beats "272/272" by a long way out loud. If you have real pilot numbers, replace the placeholder.
+➡ Transition: "And we own our bugs too."</a:t>
+            </a:r>
+            <a:endParaRPr lang="en-US" dirty="0"/>
+          </a:p>
+        </p:txBody>
+      </p:sp>
+      <p:sp>
+        <p:nvSpPr>
+          <p:cNvPr id="4" name="Slide Number Placeholder 3"/>
+          <p:cNvSpPr>
+            <a:spLocks noGrp="1"/>
+          </p:cNvSpPr>
+          <p:nvPr>
+            <p:ph type="sldNum" sz="quarter" idx="10"/>
+          </p:nvPr>
+        </p:nvSpPr>
+        <p:spPr/>
+        <p:txBody>
+          <a:bodyPr/>
+          <a:lstStyle/>
+          <a:p>
+            <a:fld id="{F7021451-1387-4CA6-816F-3879F97B5CBC}" type="slidenum">
+              <a:rPr lang="en-US"/>
+              <a:t>12</a:t>
+            </a:fld>
+            <a:endParaRPr lang="en-US"/>
+          </a:p>
+        </p:txBody>
+      </p:sp>
+    </p:spTree>
+    <p:extLst>
+      <p:ext uri="{BB962C8B-B14F-4D97-AF65-F5344CB8AC3E}">
+        <p14:creationId xmlns:p14="http://schemas.microsoft.com/office/powerpoint/2010/main" val="1024086991"/>
+      </p:ext>
+    </p:extLst>
+  </p:cSld>
+  <p:clrMapOvr>
+    <a:masterClrMapping/>
+  </p:clrMapOvr>
+</p:notes>
+</file>
+
+<file path=ppt/notesSlides/notesSlide13.xml><?xml version="1.0" encoding="utf-8"?>
+<p:notes xmlns:a="http://schemas.openxmlformats.org/drawingml/2006/main" xmlns:r="http://schemas.openxmlformats.org/officeDocument/2006/relationships" xmlns:p="http://schemas.openxmlformats.org/presentationml/2006/main">
+  <p:cSld>
+    <p:spTree>
+      <p:nvGrpSpPr>
+        <p:cNvPr id="1" name=""/>
+        <p:cNvGrpSpPr/>
+        <p:nvPr/>
+      </p:nvGrpSpPr>
+      <p:grpSpPr>
+        <a:xfrm>
+          <a:off x="0" y="0"/>
+          <a:ext cx="0" cy="0"/>
+          <a:chOff x="0" y="0"/>
+          <a:chExt cx="0" cy="0"/>
+        </a:xfrm>
+      </p:grpSpPr>
+      <p:sp>
+        <p:nvSpPr>
+          <p:cNvPr id="2" name="Slide Image Placeholder 1"/>
+          <p:cNvSpPr>
+            <a:spLocks noGrp="1" noRot="1" noChangeAspect="1"/>
+          </p:cNvSpPr>
+          <p:nvPr>
+            <p:ph type="sldImg"/>
+          </p:nvPr>
+        </p:nvSpPr>
+        <p:spPr/>
+      </p:sp>
+      <p:sp>
+        <p:nvSpPr>
+          <p:cNvPr id="3" name="Notes Placeholder 2"/>
+          <p:cNvSpPr>
+            <a:spLocks noGrp="1"/>
+          </p:cNvSpPr>
+          <p:nvPr>
+            <p:ph type="body" idx="1"/>
+          </p:nvPr>
+        </p:nvSpPr>
+        <p:spPr/>
+        <p:txBody>
+          <a:bodyPr/>
+          <a:lstStyle/>
+          <a:p>
+            <a:r>
+              <a:rPr lang="en-US" dirty="0"/>
+              <a:t>🎤 SCRIPT · Slide 13 · Failures we owned
 ⏱ ~30 seconds · 5-min cut: DEFAULT-CUT (keep for 6-min slot)
 "And we own our bugs.
 We tried the SDK subprocess for image-to-story.
@@ -751,7 +958,7 @@
           <a:p>
             <a:fld id="{F7021451-1387-4CA6-816F-3879F97B5CBC}" type="slidenum">
               <a:rPr lang="en-US"/>
-              <a:t>11</a:t>
+              <a:t>13</a:t>
             </a:fld>
             <a:endParaRPr lang="en-US"/>
           </a:p>
@@ -770,7 +977,7 @@
 </p:notes>
 </file>
 
-<file path=ppt/notesSlides/notesSlide12.xml><?xml version="1.0" encoding="utf-8"?>
+<file path=ppt/notesSlides/notesSlide14.xml><?xml version="1.0" encoding="utf-8"?>
 <p:notes xmlns:a="http://schemas.openxmlformats.org/drawingml/2006/main" xmlns:r="http://schemas.openxmlformats.org/officeDocument/2006/relationships" xmlns:p="http://schemas.openxmlformats.org/presentationml/2006/main">
   <p:cSld>
     <p:spTree>
@@ -816,7 +1023,7 @@
           <a:p>
             <a:r>
               <a:rPr lang="en-US" dirty="0"/>
-              <a:t>🎤 SCRIPT · Slide 12 · Why this matters (CLOSING BOOKEND)
+              <a:t>🎤 SCRIPT · Slide 14 · Why this matters (CLOSING BOOKEND)
 ⏱ ~25 seconds · 5-min cut: KEEP
 "Why this matters.
 Agentic from day one — not a wrapper, not a prompt.
@@ -857,7 +1064,7 @@
           <a:p>
             <a:fld id="{F7021451-1387-4CA6-816F-3879F97B5CBC}" type="slidenum">
               <a:rPr lang="en-US"/>
-              <a:t>12</a:t>
+              <a:t>14</a:t>
             </a:fld>
             <a:endParaRPr lang="en-US"/>
           </a:p>
@@ -876,7 +1083,7 @@
 </p:notes>
 </file>
 
-<file path=ppt/notesSlides/notesSlide13.xml><?xml version="1.0" encoding="utf-8"?>
+<file path=ppt/notesSlides/notesSlide15.xml><?xml version="1.0" encoding="utf-8"?>
 <p:notes xmlns:a="http://schemas.openxmlformats.org/drawingml/2006/main" xmlns:r="http://schemas.openxmlformats.org/officeDocument/2006/relationships" xmlns:p="http://schemas.openxmlformats.org/presentationml/2006/main">
   <p:cSld>
     <p:spTree>
@@ -922,7 +1129,7 @@
           <a:p>
             <a:r>
               <a:rPr lang="en-US" dirty="0"/>
-              <a:t>🎤 SCRIPT · Slide 13 · Appendix (Q&amp;A backup, HIDDEN BY DEFAULT)
+              <a:t>🎤 SCRIPT · Slide 15 · Appendix (Q&amp;A backup, HIDDEN BY DEFAULT)
 ⏱ Variable · Only reveal during Q&amp;A
 This slide should be HIDDEN during the main presentation:
 Keynote → right-click slide thumbnail → Skip Slide
@@ -967,7 +1174,7 @@
           <a:p>
             <a:fld id="{F7021451-1387-4CA6-816F-3879F97B5CBC}" type="slidenum">
               <a:rPr lang="en-US"/>
-              <a:t>13</a:t>
+              <a:t>15</a:t>
             </a:fld>
             <a:endParaRPr lang="en-US"/>
           </a:p>
@@ -1460,7 +1667,225 @@
           <a:p>
             <a:r>
               <a:rPr lang="en-US" dirty="0"/>
-              <a:t>🎤 SCRIPT · Slide 6 · The team (CENTERPIECE)
+              <a:t>🎤 SCRIPT · Slide 6 · Four architecture patterns
+⏱ ~30 seconds · 5-min cut: KEEP
+"Four agent architecture patterns. We use all four.
+PATTERN ONE — single agent. One agent, one job,
+linear inference. We use it for straight TTS via
+audio_narration.
+PATTERN TWO — sub-agent fan-out. The same task
+spawned in parallel for speed. Concurrent vision
+crops, parallel character_repo lookups.
+PATTERN THREE — agent team. Multiple agents
+collaborate by ROLE, defined via AgentDefinition.
+This is our My Agent: proxy plus four role
+specialists plus safety_review.
+PATTERN FOUR — multi-agent orchestrator. Agents
+are created DYNAMICALLY. A2A extensible. The proxy
+can register new AgentDefinitions at runtime.
+Shared state within a team flows through
+build_my_agent_context. A2A extends to external
+teams as future work."
+🎬 Delivery: Read each pattern with its example. The "we use all four" claim is the punchline — most teams build one pattern and force-fit everything.
+➡ Transition: "Each agent in the team is wired to six memory layers."</a:t>
+            </a:r>
+            <a:endParaRPr lang="en-US" dirty="0"/>
+          </a:p>
+        </p:txBody>
+      </p:sp>
+      <p:sp>
+        <p:nvSpPr>
+          <p:cNvPr id="4" name="Slide Number Placeholder 3"/>
+          <p:cNvSpPr>
+            <a:spLocks noGrp="1"/>
+          </p:cNvSpPr>
+          <p:nvPr>
+            <p:ph type="sldNum" sz="quarter" idx="10"/>
+          </p:nvPr>
+        </p:nvSpPr>
+        <p:spPr/>
+        <p:txBody>
+          <a:bodyPr/>
+          <a:lstStyle/>
+          <a:p>
+            <a:fld id="{F7021451-1387-4CA6-816F-3879F97B5CBC}" type="slidenum">
+              <a:rPr lang="en-US"/>
+              <a:t>6</a:t>
+            </a:fld>
+            <a:endParaRPr lang="en-US"/>
+          </a:p>
+        </p:txBody>
+      </p:sp>
+    </p:spTree>
+    <p:extLst>
+      <p:ext uri="{BB962C8B-B14F-4D97-AF65-F5344CB8AC3E}">
+        <p14:creationId xmlns:p14="http://schemas.microsoft.com/office/powerpoint/2010/main" val="1024086991"/>
+      </p:ext>
+    </p:extLst>
+  </p:cSld>
+  <p:clrMapOvr>
+    <a:masterClrMapping/>
+  </p:clrMapOvr>
+</p:notes>
+</file>
+
+<file path=ppt/notesSlides/notesSlide7.xml><?xml version="1.0" encoding="utf-8"?>
+<p:notes xmlns:a="http://schemas.openxmlformats.org/drawingml/2006/main" xmlns:r="http://schemas.openxmlformats.org/officeDocument/2006/relationships" xmlns:p="http://schemas.openxmlformats.org/presentationml/2006/main">
+  <p:cSld>
+    <p:spTree>
+      <p:nvGrpSpPr>
+        <p:cNvPr id="1" name=""/>
+        <p:cNvGrpSpPr/>
+        <p:nvPr/>
+      </p:nvGrpSpPr>
+      <p:grpSpPr>
+        <a:xfrm>
+          <a:off x="0" y="0"/>
+          <a:ext cx="0" cy="0"/>
+          <a:chOff x="0" y="0"/>
+          <a:chExt cx="0" cy="0"/>
+        </a:xfrm>
+      </p:grpSpPr>
+      <p:sp>
+        <p:nvSpPr>
+          <p:cNvPr id="2" name="Slide Image Placeholder 1"/>
+          <p:cNvSpPr>
+            <a:spLocks noGrp="1" noRot="1" noChangeAspect="1"/>
+          </p:cNvSpPr>
+          <p:nvPr>
+            <p:ph type="sldImg"/>
+          </p:nvPr>
+        </p:nvSpPr>
+        <p:spPr/>
+      </p:sp>
+      <p:sp>
+        <p:nvSpPr>
+          <p:cNvPr id="3" name="Notes Placeholder 2"/>
+          <p:cNvSpPr>
+            <a:spLocks noGrp="1"/>
+          </p:cNvSpPr>
+          <p:nvPr>
+            <p:ph type="body" idx="1"/>
+          </p:nvPr>
+        </p:nvSpPr>
+        <p:spPr/>
+        <p:txBody>
+          <a:bodyPr/>
+          <a:lstStyle/>
+          <a:p>
+            <a:r>
+              <a:rPr lang="en-US" dirty="0"/>
+              <a:t>🎤 SCRIPT · Slide 7 · Six memory types
+⏱ ~32 seconds · 5-min cut: KEEP
+"Six memory types. One buddy. Layered recall.
+SESSION memory — this-chat conversation history,
+stored in agent_chat_repository.
+WORKING memory — per-turn execution context.
+In-flight tool results, persona, recurring characters,
+passed to every specialist via build_my_agent_context.
+EPISODIC memory — past creations.
+Stories, interactive sessions, kids_daily episodes.
+Three tables.
+FACTUAL memory — buddy persona, child profile,
+preferences. Agent repo, preference repo, users table.
+SEMANTIC memory — embeddings of characters, themes,
+narrative style. ChromaDB locally, pgvector in
+production, via the vector search MCP.
+PROCEDURAL memory — how to generate each content type.
+Versioned markdown prompts, at-tool skills, and
+enabled_skills gating per agent.
+The buddy remembers, understands, acts, talks,
+and reasons in flight."
+🎬 Delivery: Walk each row briskly. Pause briefly on PROCEDURAL — that's the one most teams don't have. Land the closing line slowly.
+➡ Transition: "Here's how those memory layers and patterns compose in our team."</a:t>
+            </a:r>
+            <a:endParaRPr lang="en-US" dirty="0"/>
+          </a:p>
+        </p:txBody>
+      </p:sp>
+      <p:sp>
+        <p:nvSpPr>
+          <p:cNvPr id="4" name="Slide Number Placeholder 3"/>
+          <p:cNvSpPr>
+            <a:spLocks noGrp="1"/>
+          </p:cNvSpPr>
+          <p:nvPr>
+            <p:ph type="sldNum" sz="quarter" idx="10"/>
+          </p:nvPr>
+        </p:nvSpPr>
+        <p:spPr/>
+        <p:txBody>
+          <a:bodyPr/>
+          <a:lstStyle/>
+          <a:p>
+            <a:fld id="{F7021451-1387-4CA6-816F-3879F97B5CBC}" type="slidenum">
+              <a:rPr lang="en-US"/>
+              <a:t>7</a:t>
+            </a:fld>
+            <a:endParaRPr lang="en-US"/>
+          </a:p>
+        </p:txBody>
+      </p:sp>
+    </p:spTree>
+    <p:extLst>
+      <p:ext uri="{BB962C8B-B14F-4D97-AF65-F5344CB8AC3E}">
+        <p14:creationId xmlns:p14="http://schemas.microsoft.com/office/powerpoint/2010/main" val="1024086991"/>
+      </p:ext>
+    </p:extLst>
+  </p:cSld>
+  <p:clrMapOvr>
+    <a:masterClrMapping/>
+  </p:clrMapOvr>
+</p:notes>
+</file>
+
+<file path=ppt/notesSlides/notesSlide8.xml><?xml version="1.0" encoding="utf-8"?>
+<p:notes xmlns:a="http://schemas.openxmlformats.org/drawingml/2006/main" xmlns:r="http://schemas.openxmlformats.org/officeDocument/2006/relationships" xmlns:p="http://schemas.openxmlformats.org/presentationml/2006/main">
+  <p:cSld>
+    <p:spTree>
+      <p:nvGrpSpPr>
+        <p:cNvPr id="1" name=""/>
+        <p:cNvGrpSpPr/>
+        <p:nvPr/>
+      </p:nvGrpSpPr>
+      <p:grpSpPr>
+        <a:xfrm>
+          <a:off x="0" y="0"/>
+          <a:ext cx="0" cy="0"/>
+          <a:chOff x="0" y="0"/>
+          <a:chExt cx="0" cy="0"/>
+        </a:xfrm>
+      </p:grpSpPr>
+      <p:sp>
+        <p:nvSpPr>
+          <p:cNvPr id="2" name="Slide Image Placeholder 1"/>
+          <p:cNvSpPr>
+            <a:spLocks noGrp="1" noRot="1" noChangeAspect="1"/>
+          </p:cNvSpPr>
+          <p:nvPr>
+            <p:ph type="sldImg"/>
+          </p:nvPr>
+        </p:nvSpPr>
+        <p:spPr/>
+      </p:sp>
+      <p:sp>
+        <p:nvSpPr>
+          <p:cNvPr id="3" name="Notes Placeholder 2"/>
+          <p:cNvSpPr>
+            <a:spLocks noGrp="1"/>
+          </p:cNvSpPr>
+          <p:nvPr>
+            <p:ph type="body" idx="1"/>
+          </p:nvPr>
+        </p:nvSpPr>
+        <p:spPr/>
+        <p:txBody>
+          <a:bodyPr/>
+          <a:lstStyle/>
+          <a:p>
+            <a:r>
+              <a:rPr lang="en-US" dirty="0"/>
+              <a:t>🎤 SCRIPT · Slide 8 · The team (CENTERPIECE)
 ⏱ ~50 seconds · 5-min cut: KEEP
 "Branching adventures, daily podcasts, per-reply
 safety — each needed its own expertise. So we
@@ -1510,7 +1935,7 @@
           <a:p>
             <a:fld id="{F7021451-1387-4CA6-816F-3879F97B5CBC}" type="slidenum">
               <a:rPr lang="en-US"/>
-              <a:t>6</a:t>
+              <a:t>8</a:t>
             </a:fld>
             <a:endParaRPr lang="en-US"/>
           </a:p>
@@ -1529,7 +1954,7 @@
 </p:notes>
 </file>
 
-<file path=ppt/notesSlides/notesSlide7.xml><?xml version="1.0" encoding="utf-8"?>
+<file path=ppt/notesSlides/notesSlide9.xml><?xml version="1.0" encoding="utf-8"?>
 <p:notes xmlns:a="http://schemas.openxmlformats.org/drawingml/2006/main" xmlns:r="http://schemas.openxmlformats.org/officeDocument/2006/relationships" xmlns:p="http://schemas.openxmlformats.org/presentationml/2006/main">
   <p:cSld>
     <p:spTree>
@@ -1575,7 +2000,7 @@
           <a:p>
             <a:r>
               <a:rPr lang="en-US" dirty="0"/>
-              <a:t>🎤 SCRIPT · Slide 7 · Why this shape (rationale)
+              <a:t>🎤 SCRIPT · Slide 9 · Why this shape (rationale)
 ⏱ ~30 seconds · 5-min cut: DEFAULT-CUT (keep for 6-min slot)
 "Every primitive on the previous slides was a decision.
 PROMPTS — we could have inlined them as Python f-strings.
@@ -1593,211 +2018,6 @@
 We didn't adopt defaults."
 🎬 Delivery: Walk row by row, ~7 seconds each. Land hard on "We didn't adopt defaults."
 ➡ Transition: "Three layers, six bets — here's where we innovate."</a:t>
-            </a:r>
-            <a:endParaRPr lang="en-US" dirty="0"/>
-          </a:p>
-        </p:txBody>
-      </p:sp>
-      <p:sp>
-        <p:nvSpPr>
-          <p:cNvPr id="4" name="Slide Number Placeholder 3"/>
-          <p:cNvSpPr>
-            <a:spLocks noGrp="1"/>
-          </p:cNvSpPr>
-          <p:nvPr>
-            <p:ph type="sldNum" sz="quarter" idx="10"/>
-          </p:nvPr>
-        </p:nvSpPr>
-        <p:spPr/>
-        <p:txBody>
-          <a:bodyPr/>
-          <a:lstStyle/>
-          <a:p>
-            <a:fld id="{F7021451-1387-4CA6-816F-3879F97B5CBC}" type="slidenum">
-              <a:rPr lang="en-US"/>
-              <a:t>7</a:t>
-            </a:fld>
-            <a:endParaRPr lang="en-US"/>
-          </a:p>
-        </p:txBody>
-      </p:sp>
-    </p:spTree>
-    <p:extLst>
-      <p:ext uri="{BB962C8B-B14F-4D97-AF65-F5344CB8AC3E}">
-        <p14:creationId xmlns:p14="http://schemas.microsoft.com/office/powerpoint/2010/main" val="1024086991"/>
-      </p:ext>
-    </p:extLst>
-  </p:cSld>
-  <p:clrMapOvr>
-    <a:masterClrMapping/>
-  </p:clrMapOvr>
-</p:notes>
-</file>
-
-<file path=ppt/notesSlides/notesSlide8.xml><?xml version="1.0" encoding="utf-8"?>
-<p:notes xmlns:a="http://schemas.openxmlformats.org/drawingml/2006/main" xmlns:r="http://schemas.openxmlformats.org/officeDocument/2006/relationships" xmlns:p="http://schemas.openxmlformats.org/presentationml/2006/main">
-  <p:cSld>
-    <p:spTree>
-      <p:nvGrpSpPr>
-        <p:cNvPr id="1" name=""/>
-        <p:cNvGrpSpPr/>
-        <p:nvPr/>
-      </p:nvGrpSpPr>
-      <p:grpSpPr>
-        <a:xfrm>
-          <a:off x="0" y="0"/>
-          <a:ext cx="0" cy="0"/>
-          <a:chOff x="0" y="0"/>
-          <a:chExt cx="0" cy="0"/>
-        </a:xfrm>
-      </p:grpSpPr>
-      <p:sp>
-        <p:nvSpPr>
-          <p:cNvPr id="2" name="Slide Image Placeholder 1"/>
-          <p:cNvSpPr>
-            <a:spLocks noGrp="1" noRot="1" noChangeAspect="1"/>
-          </p:cNvSpPr>
-          <p:nvPr>
-            <p:ph type="sldImg"/>
-          </p:nvPr>
-        </p:nvSpPr>
-        <p:spPr/>
-      </p:sp>
-      <p:sp>
-        <p:nvSpPr>
-          <p:cNvPr id="3" name="Notes Placeholder 2"/>
-          <p:cNvSpPr>
-            <a:spLocks noGrp="1"/>
-          </p:cNvSpPr>
-          <p:nvPr>
-            <p:ph type="body" idx="1"/>
-          </p:nvPr>
-        </p:nvSpPr>
-        <p:spPr/>
-        <p:txBody>
-          <a:bodyPr/>
-          <a:lstStyle/>
-          <a:p>
-            <a:r>
-              <a:rPr lang="en-US" dirty="0"/>
-              <a:t>🎤 SCRIPT · Slide 8 · What's good about it (moats)
-⏱ ~30 seconds · 5-min cut: KEEP
-"Three layers. Six specific bets.
-AGENTIC STACK — multi-agent with shared state on Claude
-Agent SDK. A2A extensible — new specialists plug in
-by registering one AgentDefinition.
-SAFETY ARCHITECTURE — per-reply programmatic safety,
-age-aware thresholds. And COPPA enforced AT THE SCHEMA
-LEVEL. The unsafe JOIN can't even be expressed.
-KID EXPERIENCE — character continuity across image,
-story, podcast, and community. One buddy, many
-specialists, one identity.
-[brief pause]
-Most kid-AI products ship ONE of these.
-We ship ALL SIX."
-🎬 Delivery: Read each cell as a defensible CLAIM, not a feature list. PAUSE before the closing line. Land hard on "all six."
-➡ Transition: "Here's what kids actually do."</a:t>
-            </a:r>
-            <a:endParaRPr lang="en-US" dirty="0"/>
-          </a:p>
-        </p:txBody>
-      </p:sp>
-      <p:sp>
-        <p:nvSpPr>
-          <p:cNvPr id="4" name="Slide Number Placeholder 3"/>
-          <p:cNvSpPr>
-            <a:spLocks noGrp="1"/>
-          </p:cNvSpPr>
-          <p:nvPr>
-            <p:ph type="sldNum" sz="quarter" idx="10"/>
-          </p:nvPr>
-        </p:nvSpPr>
-        <p:spPr/>
-        <p:txBody>
-          <a:bodyPr/>
-          <a:lstStyle/>
-          <a:p>
-            <a:fld id="{F7021451-1387-4CA6-816F-3879F97B5CBC}" type="slidenum">
-              <a:rPr lang="en-US"/>
-              <a:t>8</a:t>
-            </a:fld>
-            <a:endParaRPr lang="en-US"/>
-          </a:p>
-        </p:txBody>
-      </p:sp>
-    </p:spTree>
-    <p:extLst>
-      <p:ext uri="{BB962C8B-B14F-4D97-AF65-F5344CB8AC3E}">
-        <p14:creationId xmlns:p14="http://schemas.microsoft.com/office/powerpoint/2010/main" val="1024086991"/>
-      </p:ext>
-    </p:extLst>
-  </p:cSld>
-  <p:clrMapOvr>
-    <a:masterClrMapping/>
-  </p:clrMapOvr>
-</p:notes>
-</file>
-
-<file path=ppt/notesSlides/notesSlide9.xml><?xml version="1.0" encoding="utf-8"?>
-<p:notes xmlns:a="http://schemas.openxmlformats.org/drawingml/2006/main" xmlns:r="http://schemas.openxmlformats.org/officeDocument/2006/relationships" xmlns:p="http://schemas.openxmlformats.org/presentationml/2006/main">
-  <p:cSld>
-    <p:spTree>
-      <p:nvGrpSpPr>
-        <p:cNvPr id="1" name=""/>
-        <p:cNvGrpSpPr/>
-        <p:nvPr/>
-      </p:nvGrpSpPr>
-      <p:grpSpPr>
-        <a:xfrm>
-          <a:off x="0" y="0"/>
-          <a:ext cx="0" cy="0"/>
-          <a:chOff x="0" y="0"/>
-          <a:chExt cx="0" cy="0"/>
-        </a:xfrm>
-      </p:grpSpPr>
-      <p:sp>
-        <p:nvSpPr>
-          <p:cNvPr id="2" name="Slide Image Placeholder 1"/>
-          <p:cNvSpPr>
-            <a:spLocks noGrp="1" noRot="1" noChangeAspect="1"/>
-          </p:cNvSpPr>
-          <p:nvPr>
-            <p:ph type="sldImg"/>
-          </p:nvPr>
-        </p:nvSpPr>
-        <p:spPr/>
-      </p:sp>
-      <p:sp>
-        <p:nvSpPr>
-          <p:cNvPr id="3" name="Notes Placeholder 2"/>
-          <p:cNvSpPr>
-            <a:spLocks noGrp="1"/>
-          </p:cNvSpPr>
-          <p:nvPr>
-            <p:ph type="body" idx="1"/>
-          </p:nvPr>
-        </p:nvSpPr>
-        <p:spPr/>
-        <p:txBody>
-          <a:bodyPr/>
-          <a:lstStyle/>
-          <a:p>
-            <a:r>
-              <a:rPr lang="en-US" dirty="0"/>
-              <a:t>🎤 SCRIPT · Slide 9 · Product proof + demo beat
-⏱ ~35 seconds · 5-min cut: KEEP
-"You can see the buddy here — Dianna in this case —
-offering three starter prompts.
-Each one routes to a different specialist underneath.
-'Tell me a bedtime story' goes to image_story.
-'What's in the news for kids' goes to kids_daily.
-'Choose your own adventure' goes to interactive_story.
-One chat surface. The multi-agent team behind it.
-[OPTIONAL — 15-second live demo here. Open the app.
-Draw → buddy generates a story with their character.
-Pick ONE flow, not all four. Let it land.]"
-🎬 Delivery: Point at the hero screenshot. Read the 3 prompts. Make the mapping to specialists EXPLICIT — it's the proof of the slide-7 architecture.
-➡ Transition: "Here's where we are in shipping this."</a:t>
             </a:r>
             <a:endParaRPr lang="en-US" dirty="0"/>
           </a:p>
@@ -2305,6 +2525,84 @@
 <file path=ppt/slides/slide13.xml><?xml version="1.0" encoding="utf-8"?>
 <p:sld xmlns:a="http://schemas.openxmlformats.org/drawingml/2006/main" xmlns:r="http://schemas.openxmlformats.org/officeDocument/2006/relationships" xmlns:p="http://schemas.openxmlformats.org/presentationml/2006/main">
   <p:cSld name="Slide 13">
+    <p:bg>
+      <p:bgPr>
+        <a:blipFill dpi="0" rotWithShape="1">
+          <a:blip r:embed="rId1">
+            <a:lum/>
+          </a:blip>
+          <a:srcRect/>
+          <a:stretch>
+            <a:fillRect/>
+          </a:stretch>
+        </a:blipFill>
+        <a:effectLst/>
+      </p:bgPr>
+    </p:bg>
+    <p:spTree>
+      <p:nvGrpSpPr>
+        <p:cNvPr id="1" name=""/>
+        <p:cNvGrpSpPr/>
+        <p:nvPr/>
+      </p:nvGrpSpPr>
+      <p:grpSpPr>
+        <a:xfrm>
+          <a:off x="0" y="0"/>
+          <a:ext cx="0" cy="0"/>
+          <a:chOff x="0" y="0"/>
+          <a:chExt cx="0" cy="0"/>
+        </a:xfrm>
+      </p:grpSpPr>
+    </p:spTree>
+  </p:cSld>
+  <p:clrMapOvr>
+    <a:masterClrMapping/>
+  </p:clrMapOvr>
+</p:sld>
+</file>
+
+<file path=ppt/slides/slide14.xml><?xml version="1.0" encoding="utf-8"?>
+<p:sld xmlns:a="http://schemas.openxmlformats.org/drawingml/2006/main" xmlns:r="http://schemas.openxmlformats.org/officeDocument/2006/relationships" xmlns:p="http://schemas.openxmlformats.org/presentationml/2006/main">
+  <p:cSld name="Slide 14">
+    <p:bg>
+      <p:bgPr>
+        <a:blipFill dpi="0" rotWithShape="1">
+          <a:blip r:embed="rId1">
+            <a:lum/>
+          </a:blip>
+          <a:srcRect/>
+          <a:stretch>
+            <a:fillRect/>
+          </a:stretch>
+        </a:blipFill>
+        <a:effectLst/>
+      </p:bgPr>
+    </p:bg>
+    <p:spTree>
+      <p:nvGrpSpPr>
+        <p:cNvPr id="1" name=""/>
+        <p:cNvGrpSpPr/>
+        <p:nvPr/>
+      </p:nvGrpSpPr>
+      <p:grpSpPr>
+        <a:xfrm>
+          <a:off x="0" y="0"/>
+          <a:ext cx="0" cy="0"/>
+          <a:chOff x="0" y="0"/>
+          <a:chExt cx="0" cy="0"/>
+        </a:xfrm>
+      </p:grpSpPr>
+    </p:spTree>
+  </p:cSld>
+  <p:clrMapOvr>
+    <a:masterClrMapping/>
+  </p:clrMapOvr>
+</p:sld>
+</file>
+
+<file path=ppt/slides/slide15.xml><?xml version="1.0" encoding="utf-8"?>
+<p:sld xmlns:a="http://schemas.openxmlformats.org/drawingml/2006/main" xmlns:r="http://schemas.openxmlformats.org/officeDocument/2006/relationships" xmlns:p="http://schemas.openxmlformats.org/presentationml/2006/main">
+  <p:cSld name="Slide 15">
     <p:bg>
       <p:bgPr>
         <a:blipFill dpi="0" rotWithShape="1">
